--- a/AI-Health-Navigator-Recruit.pptx
+++ b/AI-Health-Navigator-Recruit.pptx
@@ -1,23 +1,23 @@
 
 <file path=ppt/presentation.xml><?xml version="1.0" encoding="utf-8"?>
-<p:presentation xmlns:a="http://schemas.openxmlformats.org/drawingml/2006/main" xmlns:r="http://schemas.openxmlformats.org/officeDocument/2006/relationships" xmlns:p="http://schemas.openxmlformats.org/presentationml/2006/main" saveSubsetFonts="1" autoCompressPictures="0">
+<p:presentation xmlns:a="http://schemas.openxmlformats.org/drawingml/2006/main" xmlns:r="http://schemas.openxmlformats.org/officeDocument/2006/relationships" xmlns:p="http://schemas.openxmlformats.org/presentationml/2006/main" autoCompressPictures="0">
   <p:sldMasterIdLst>
     <p:sldMasterId id="2147483648" r:id="rId1"/>
   </p:sldMasterIdLst>
   <p:sldIdLst>
-    <p:sldId id="256" r:id="rId7"/>
-    <p:sldId id="257" r:id="rId8"/>
-    <p:sldId id="258" r:id="rId9"/>
-    <p:sldId id="259" r:id="rId10"/>
-    <p:sldId id="260" r:id="rId11"/>
-    <p:sldId id="261" r:id="rId12"/>
-    <p:sldId id="262" r:id="rId13"/>
-    <p:sldId id="263" r:id="rId14"/>
-    <p:sldId id="264" r:id="rId15"/>
-    <p:sldId id="265" r:id="rId16"/>
-    <p:sldId id="266" r:id="rId17"/>
+    <p:sldId id="256" r:id="rId3"/>
+    <p:sldId id="257" r:id="rId4"/>
+    <p:sldId id="258" r:id="rId5"/>
+    <p:sldId id="259" r:id="rId6"/>
+    <p:sldId id="260" r:id="rId7"/>
+    <p:sldId id="261" r:id="rId8"/>
+    <p:sldId id="262" r:id="rId9"/>
+    <p:sldId id="263" r:id="rId10"/>
+    <p:sldId id="264" r:id="rId11"/>
+    <p:sldId id="265" r:id="rId12"/>
+    <p:sldId id="266" r:id="rId13"/>
   </p:sldIdLst>
-  <p:sldSz cx="12191695" cy="6858000" type="screen4x3"/>
+  <p:sldSz cx="12191365" cy="6858000" type="screen4x3"/>
   <p:notesSz cx="6858000" cy="9144000"/>
   <p:defaultTextStyle>
     <a:defPPr>
@@ -114,6 +114,22 @@
       </a:defRPr>
     </a:lvl9pPr>
   </p:defaultTextStyle>
+  <p:extLst>
+    <p:ext uri="{EFAFB233-063F-42B5-8137-9DF3F51BA10A}">
+      <p15:sldGuideLst xmlns:p15="http://schemas.microsoft.com/office/powerpoint/2012/main">
+        <p15:guide id="1" orient="horz" pos="2160" userDrawn="1">
+          <p15:clr>
+            <a:srgbClr val="A4A3A4"/>
+          </p15:clr>
+        </p15:guide>
+        <p15:guide id="2" pos="2880" userDrawn="1">
+          <p15:clr>
+            <a:srgbClr val="A4A3A4"/>
+          </p15:clr>
+        </p15:guide>
+      </p15:sldGuideLst>
+    </p:ext>
+  </p:extLst>
 </p:presentation>
 </file>
 
@@ -298,7 +314,6 @@
           <a:p>
             <a:fld id="{5BCAD085-E8A6-8845-BD4E-CB4CCA059FC4}" type="datetimeFigureOut">
               <a:rPr lang="en-US" smtClean="0"/>
-              <a:t>1/27/13</a:t>
             </a:fld>
             <a:endParaRPr lang="en-US"/>
           </a:p>
@@ -340,18 +355,12 @@
           <a:p>
             <a:fld id="{C1FF6DA9-008F-8B48-92A6-B652298478BF}" type="slidenum">
               <a:rPr lang="en-US" smtClean="0"/>
-              <a:t>‹#›</a:t>
             </a:fld>
             <a:endParaRPr lang="en-US"/>
           </a:p>
         </p:txBody>
       </p:sp>
     </p:spTree>
-    <p:extLst>
-      <p:ext uri="{BB962C8B-B14F-4D97-AF65-F5344CB8AC3E}">
-        <p14:creationId xmlns:p14="http://schemas.microsoft.com/office/powerpoint/2010/main" val="3168075583"/>
-      </p:ext>
-    </p:extLst>
   </p:cSld>
   <p:clrMapOvr>
     <a:masterClrMapping/>
@@ -419,6 +428,7 @@
               <a:rPr lang="en-US" smtClean="0"/>
               <a:t>Click to edit Master text styles</a:t>
             </a:r>
+            <a:endParaRPr lang="en-US" smtClean="0"/>
           </a:p>
           <a:p>
             <a:pPr lvl="1"/>
@@ -426,6 +436,7 @@
               <a:rPr lang="en-US" smtClean="0"/>
               <a:t>Second level</a:t>
             </a:r>
+            <a:endParaRPr lang="en-US" smtClean="0"/>
           </a:p>
           <a:p>
             <a:pPr lvl="2"/>
@@ -433,6 +444,7 @@
               <a:rPr lang="en-US" smtClean="0"/>
               <a:t>Third level</a:t>
             </a:r>
+            <a:endParaRPr lang="en-US" smtClean="0"/>
           </a:p>
           <a:p>
             <a:pPr lvl="3"/>
@@ -440,6 +452,7 @@
               <a:rPr lang="en-US" smtClean="0"/>
               <a:t>Fourth level</a:t>
             </a:r>
+            <a:endParaRPr lang="en-US" smtClean="0"/>
           </a:p>
           <a:p>
             <a:pPr lvl="4"/>
@@ -468,7 +481,6 @@
           <a:p>
             <a:fld id="{5BCAD085-E8A6-8845-BD4E-CB4CCA059FC4}" type="datetimeFigureOut">
               <a:rPr lang="en-US" smtClean="0"/>
-              <a:t>1/27/13</a:t>
             </a:fld>
             <a:endParaRPr lang="en-US"/>
           </a:p>
@@ -510,18 +522,12 @@
           <a:p>
             <a:fld id="{C1FF6DA9-008F-8B48-92A6-B652298478BF}" type="slidenum">
               <a:rPr lang="en-US" smtClean="0"/>
-              <a:t>‹#›</a:t>
             </a:fld>
             <a:endParaRPr lang="en-US"/>
           </a:p>
         </p:txBody>
       </p:sp>
     </p:spTree>
-    <p:extLst>
-      <p:ext uri="{BB962C8B-B14F-4D97-AF65-F5344CB8AC3E}">
-        <p14:creationId xmlns:p14="http://schemas.microsoft.com/office/powerpoint/2010/main" val="2910927964"/>
-      </p:ext>
-    </p:extLst>
   </p:cSld>
   <p:clrMapOvr>
     <a:masterClrMapping/>
@@ -599,6 +605,7 @@
               <a:rPr lang="en-US" smtClean="0"/>
               <a:t>Click to edit Master text styles</a:t>
             </a:r>
+            <a:endParaRPr lang="en-US" smtClean="0"/>
           </a:p>
           <a:p>
             <a:pPr lvl="1"/>
@@ -606,6 +613,7 @@
               <a:rPr lang="en-US" smtClean="0"/>
               <a:t>Second level</a:t>
             </a:r>
+            <a:endParaRPr lang="en-US" smtClean="0"/>
           </a:p>
           <a:p>
             <a:pPr lvl="2"/>
@@ -613,6 +621,7 @@
               <a:rPr lang="en-US" smtClean="0"/>
               <a:t>Third level</a:t>
             </a:r>
+            <a:endParaRPr lang="en-US" smtClean="0"/>
           </a:p>
           <a:p>
             <a:pPr lvl="3"/>
@@ -620,6 +629,7 @@
               <a:rPr lang="en-US" smtClean="0"/>
               <a:t>Fourth level</a:t>
             </a:r>
+            <a:endParaRPr lang="en-US" smtClean="0"/>
           </a:p>
           <a:p>
             <a:pPr lvl="4"/>
@@ -648,7 +658,6 @@
           <a:p>
             <a:fld id="{5BCAD085-E8A6-8845-BD4E-CB4CCA059FC4}" type="datetimeFigureOut">
               <a:rPr lang="en-US" smtClean="0"/>
-              <a:t>1/27/13</a:t>
             </a:fld>
             <a:endParaRPr lang="en-US"/>
           </a:p>
@@ -690,18 +699,12 @@
           <a:p>
             <a:fld id="{C1FF6DA9-008F-8B48-92A6-B652298478BF}" type="slidenum">
               <a:rPr lang="en-US" smtClean="0"/>
-              <a:t>‹#›</a:t>
             </a:fld>
             <a:endParaRPr lang="en-US"/>
           </a:p>
         </p:txBody>
       </p:sp>
     </p:spTree>
-    <p:extLst>
-      <p:ext uri="{BB962C8B-B14F-4D97-AF65-F5344CB8AC3E}">
-        <p14:creationId xmlns:p14="http://schemas.microsoft.com/office/powerpoint/2010/main" val="3612223792"/>
-      </p:ext>
-    </p:extLst>
   </p:cSld>
   <p:clrMapOvr>
     <a:masterClrMapping/>
@@ -769,6 +772,7 @@
               <a:rPr lang="en-US" smtClean="0"/>
               <a:t>Click to edit Master text styles</a:t>
             </a:r>
+            <a:endParaRPr lang="en-US" smtClean="0"/>
           </a:p>
           <a:p>
             <a:pPr lvl="1"/>
@@ -776,6 +780,7 @@
               <a:rPr lang="en-US" smtClean="0"/>
               <a:t>Second level</a:t>
             </a:r>
+            <a:endParaRPr lang="en-US" smtClean="0"/>
           </a:p>
           <a:p>
             <a:pPr lvl="2"/>
@@ -783,6 +788,7 @@
               <a:rPr lang="en-US" smtClean="0"/>
               <a:t>Third level</a:t>
             </a:r>
+            <a:endParaRPr lang="en-US" smtClean="0"/>
           </a:p>
           <a:p>
             <a:pPr lvl="3"/>
@@ -790,6 +796,7 @@
               <a:rPr lang="en-US" smtClean="0"/>
               <a:t>Fourth level</a:t>
             </a:r>
+            <a:endParaRPr lang="en-US" smtClean="0"/>
           </a:p>
           <a:p>
             <a:pPr lvl="4"/>
@@ -818,7 +825,6 @@
           <a:p>
             <a:fld id="{5BCAD085-E8A6-8845-BD4E-CB4CCA059FC4}" type="datetimeFigureOut">
               <a:rPr lang="en-US" smtClean="0"/>
-              <a:t>1/27/13</a:t>
             </a:fld>
             <a:endParaRPr lang="en-US"/>
           </a:p>
@@ -860,18 +866,12 @@
           <a:p>
             <a:fld id="{C1FF6DA9-008F-8B48-92A6-B652298478BF}" type="slidenum">
               <a:rPr lang="en-US" smtClean="0"/>
-              <a:t>‹#›</a:t>
             </a:fld>
             <a:endParaRPr lang="en-US"/>
           </a:p>
         </p:txBody>
       </p:sp>
     </p:spTree>
-    <p:extLst>
-      <p:ext uri="{BB962C8B-B14F-4D97-AF65-F5344CB8AC3E}">
-        <p14:creationId xmlns:p14="http://schemas.microsoft.com/office/powerpoint/2010/main" val="2614314258"/>
-      </p:ext>
-    </p:extLst>
   </p:cSld>
   <p:clrMapOvr>
     <a:masterClrMapping/>
@@ -1044,6 +1044,7 @@
               <a:rPr lang="en-US" smtClean="0"/>
               <a:t>Click to edit Master text styles</a:t>
             </a:r>
+            <a:endParaRPr lang="en-US" smtClean="0"/>
           </a:p>
         </p:txBody>
       </p:sp>
@@ -1064,7 +1065,6 @@
           <a:p>
             <a:fld id="{5BCAD085-E8A6-8845-BD4E-CB4CCA059FC4}" type="datetimeFigureOut">
               <a:rPr lang="en-US" smtClean="0"/>
-              <a:t>1/27/13</a:t>
             </a:fld>
             <a:endParaRPr lang="en-US"/>
           </a:p>
@@ -1106,18 +1106,12 @@
           <a:p>
             <a:fld id="{C1FF6DA9-008F-8B48-92A6-B652298478BF}" type="slidenum">
               <a:rPr lang="en-US" smtClean="0"/>
-              <a:t>‹#›</a:t>
             </a:fld>
             <a:endParaRPr lang="en-US"/>
           </a:p>
         </p:txBody>
       </p:sp>
     </p:spTree>
-    <p:extLst>
-      <p:ext uri="{BB962C8B-B14F-4D97-AF65-F5344CB8AC3E}">
-        <p14:creationId xmlns:p14="http://schemas.microsoft.com/office/powerpoint/2010/main" val="960648375"/>
-      </p:ext>
-    </p:extLst>
   </p:cSld>
   <p:clrMapOvr>
     <a:masterClrMapping/>
@@ -1218,6 +1212,7 @@
               <a:rPr lang="en-US" smtClean="0"/>
               <a:t>Click to edit Master text styles</a:t>
             </a:r>
+            <a:endParaRPr lang="en-US" smtClean="0"/>
           </a:p>
           <a:p>
             <a:pPr lvl="1"/>
@@ -1225,6 +1220,7 @@
               <a:rPr lang="en-US" smtClean="0"/>
               <a:t>Second level</a:t>
             </a:r>
+            <a:endParaRPr lang="en-US" smtClean="0"/>
           </a:p>
           <a:p>
             <a:pPr lvl="2"/>
@@ -1232,6 +1228,7 @@
               <a:rPr lang="en-US" smtClean="0"/>
               <a:t>Third level</a:t>
             </a:r>
+            <a:endParaRPr lang="en-US" smtClean="0"/>
           </a:p>
           <a:p>
             <a:pPr lvl="3"/>
@@ -1239,6 +1236,7 @@
               <a:rPr lang="en-US" smtClean="0"/>
               <a:t>Fourth level</a:t>
             </a:r>
+            <a:endParaRPr lang="en-US" smtClean="0"/>
           </a:p>
           <a:p>
             <a:pPr lvl="4"/>
@@ -1303,6 +1301,7 @@
               <a:rPr lang="en-US" smtClean="0"/>
               <a:t>Click to edit Master text styles</a:t>
             </a:r>
+            <a:endParaRPr lang="en-US" smtClean="0"/>
           </a:p>
           <a:p>
             <a:pPr lvl="1"/>
@@ -1310,6 +1309,7 @@
               <a:rPr lang="en-US" smtClean="0"/>
               <a:t>Second level</a:t>
             </a:r>
+            <a:endParaRPr lang="en-US" smtClean="0"/>
           </a:p>
           <a:p>
             <a:pPr lvl="2"/>
@@ -1317,6 +1317,7 @@
               <a:rPr lang="en-US" smtClean="0"/>
               <a:t>Third level</a:t>
             </a:r>
+            <a:endParaRPr lang="en-US" smtClean="0"/>
           </a:p>
           <a:p>
             <a:pPr lvl="3"/>
@@ -1324,6 +1325,7 @@
               <a:rPr lang="en-US" smtClean="0"/>
               <a:t>Fourth level</a:t>
             </a:r>
+            <a:endParaRPr lang="en-US" smtClean="0"/>
           </a:p>
           <a:p>
             <a:pPr lvl="4"/>
@@ -1352,7 +1354,6 @@
           <a:p>
             <a:fld id="{5BCAD085-E8A6-8845-BD4E-CB4CCA059FC4}" type="datetimeFigureOut">
               <a:rPr lang="en-US" smtClean="0"/>
-              <a:t>1/27/13</a:t>
             </a:fld>
             <a:endParaRPr lang="en-US"/>
           </a:p>
@@ -1394,18 +1395,12 @@
           <a:p>
             <a:fld id="{C1FF6DA9-008F-8B48-92A6-B652298478BF}" type="slidenum">
               <a:rPr lang="en-US" smtClean="0"/>
-              <a:t>‹#›</a:t>
             </a:fld>
             <a:endParaRPr lang="en-US"/>
           </a:p>
         </p:txBody>
       </p:sp>
     </p:spTree>
-    <p:extLst>
-      <p:ext uri="{BB962C8B-B14F-4D97-AF65-F5344CB8AC3E}">
-        <p14:creationId xmlns:p14="http://schemas.microsoft.com/office/powerpoint/2010/main" val="2782244947"/>
-      </p:ext>
-    </p:extLst>
   </p:cSld>
   <p:clrMapOvr>
     <a:masterClrMapping/>
@@ -1519,6 +1514,7 @@
               <a:rPr lang="en-US" smtClean="0"/>
               <a:t>Click to edit Master text styles</a:t>
             </a:r>
+            <a:endParaRPr lang="en-US" smtClean="0"/>
           </a:p>
         </p:txBody>
       </p:sp>
@@ -1575,6 +1571,7 @@
               <a:rPr lang="en-US" smtClean="0"/>
               <a:t>Click to edit Master text styles</a:t>
             </a:r>
+            <a:endParaRPr lang="en-US" smtClean="0"/>
           </a:p>
           <a:p>
             <a:pPr lvl="1"/>
@@ -1582,6 +1579,7 @@
               <a:rPr lang="en-US" smtClean="0"/>
               <a:t>Second level</a:t>
             </a:r>
+            <a:endParaRPr lang="en-US" smtClean="0"/>
           </a:p>
           <a:p>
             <a:pPr lvl="2"/>
@@ -1589,6 +1587,7 @@
               <a:rPr lang="en-US" smtClean="0"/>
               <a:t>Third level</a:t>
             </a:r>
+            <a:endParaRPr lang="en-US" smtClean="0"/>
           </a:p>
           <a:p>
             <a:pPr lvl="3"/>
@@ -1596,6 +1595,7 @@
               <a:rPr lang="en-US" smtClean="0"/>
               <a:t>Fourth level</a:t>
             </a:r>
+            <a:endParaRPr lang="en-US" smtClean="0"/>
           </a:p>
           <a:p>
             <a:pPr lvl="4"/>
@@ -1669,6 +1669,7 @@
               <a:rPr lang="en-US" smtClean="0"/>
               <a:t>Click to edit Master text styles</a:t>
             </a:r>
+            <a:endParaRPr lang="en-US" smtClean="0"/>
           </a:p>
         </p:txBody>
       </p:sp>
@@ -1725,6 +1726,7 @@
               <a:rPr lang="en-US" smtClean="0"/>
               <a:t>Click to edit Master text styles</a:t>
             </a:r>
+            <a:endParaRPr lang="en-US" smtClean="0"/>
           </a:p>
           <a:p>
             <a:pPr lvl="1"/>
@@ -1732,6 +1734,7 @@
               <a:rPr lang="en-US" smtClean="0"/>
               <a:t>Second level</a:t>
             </a:r>
+            <a:endParaRPr lang="en-US" smtClean="0"/>
           </a:p>
           <a:p>
             <a:pPr lvl="2"/>
@@ -1739,6 +1742,7 @@
               <a:rPr lang="en-US" smtClean="0"/>
               <a:t>Third level</a:t>
             </a:r>
+            <a:endParaRPr lang="en-US" smtClean="0"/>
           </a:p>
           <a:p>
             <a:pPr lvl="3"/>
@@ -1746,6 +1750,7 @@
               <a:rPr lang="en-US" smtClean="0"/>
               <a:t>Fourth level</a:t>
             </a:r>
+            <a:endParaRPr lang="en-US" smtClean="0"/>
           </a:p>
           <a:p>
             <a:pPr lvl="4"/>
@@ -1774,7 +1779,6 @@
           <a:p>
             <a:fld id="{5BCAD085-E8A6-8845-BD4E-CB4CCA059FC4}" type="datetimeFigureOut">
               <a:rPr lang="en-US" smtClean="0"/>
-              <a:t>1/27/13</a:t>
             </a:fld>
             <a:endParaRPr lang="en-US"/>
           </a:p>
@@ -1816,18 +1820,12 @@
           <a:p>
             <a:fld id="{C1FF6DA9-008F-8B48-92A6-B652298478BF}" type="slidenum">
               <a:rPr lang="en-US" smtClean="0"/>
-              <a:t>‹#›</a:t>
             </a:fld>
             <a:endParaRPr lang="en-US"/>
           </a:p>
         </p:txBody>
       </p:sp>
     </p:spTree>
-    <p:extLst>
-      <p:ext uri="{BB962C8B-B14F-4D97-AF65-F5344CB8AC3E}">
-        <p14:creationId xmlns:p14="http://schemas.microsoft.com/office/powerpoint/2010/main" val="990158736"/>
-      </p:ext>
-    </p:extLst>
   </p:cSld>
   <p:clrMapOvr>
     <a:masterClrMapping/>
@@ -1892,7 +1890,6 @@
           <a:p>
             <a:fld id="{5BCAD085-E8A6-8845-BD4E-CB4CCA059FC4}" type="datetimeFigureOut">
               <a:rPr lang="en-US" smtClean="0"/>
-              <a:t>1/27/13</a:t>
             </a:fld>
             <a:endParaRPr lang="en-US"/>
           </a:p>
@@ -1934,18 +1931,12 @@
           <a:p>
             <a:fld id="{C1FF6DA9-008F-8B48-92A6-B652298478BF}" type="slidenum">
               <a:rPr lang="en-US" smtClean="0"/>
-              <a:t>‹#›</a:t>
             </a:fld>
             <a:endParaRPr lang="en-US"/>
           </a:p>
         </p:txBody>
       </p:sp>
     </p:spTree>
-    <p:extLst>
-      <p:ext uri="{BB962C8B-B14F-4D97-AF65-F5344CB8AC3E}">
-        <p14:creationId xmlns:p14="http://schemas.microsoft.com/office/powerpoint/2010/main" val="727027711"/>
-      </p:ext>
-    </p:extLst>
   </p:cSld>
   <p:clrMapOvr>
     <a:masterClrMapping/>
@@ -1987,7 +1978,6 @@
           <a:p>
             <a:fld id="{5BCAD085-E8A6-8845-BD4E-CB4CCA059FC4}" type="datetimeFigureOut">
               <a:rPr lang="en-US" smtClean="0"/>
-              <a:t>1/27/13</a:t>
             </a:fld>
             <a:endParaRPr lang="en-US"/>
           </a:p>
@@ -2029,18 +2019,12 @@
           <a:p>
             <a:fld id="{C1FF6DA9-008F-8B48-92A6-B652298478BF}" type="slidenum">
               <a:rPr lang="en-US" smtClean="0"/>
-              <a:t>‹#›</a:t>
             </a:fld>
             <a:endParaRPr lang="en-US"/>
           </a:p>
         </p:txBody>
       </p:sp>
     </p:spTree>
-    <p:extLst>
-      <p:ext uri="{BB962C8B-B14F-4D97-AF65-F5344CB8AC3E}">
-        <p14:creationId xmlns:p14="http://schemas.microsoft.com/office/powerpoint/2010/main" val="1212999818"/>
-      </p:ext>
-    </p:extLst>
   </p:cSld>
   <p:clrMapOvr>
     <a:masterClrMapping/>
@@ -2150,6 +2134,7 @@
               <a:rPr lang="en-US" smtClean="0"/>
               <a:t>Click to edit Master text styles</a:t>
             </a:r>
+            <a:endParaRPr lang="en-US" smtClean="0"/>
           </a:p>
           <a:p>
             <a:pPr lvl="1"/>
@@ -2157,6 +2142,7 @@
               <a:rPr lang="en-US" smtClean="0"/>
               <a:t>Second level</a:t>
             </a:r>
+            <a:endParaRPr lang="en-US" smtClean="0"/>
           </a:p>
           <a:p>
             <a:pPr lvl="2"/>
@@ -2164,6 +2150,7 @@
               <a:rPr lang="en-US" smtClean="0"/>
               <a:t>Third level</a:t>
             </a:r>
+            <a:endParaRPr lang="en-US" smtClean="0"/>
           </a:p>
           <a:p>
             <a:pPr lvl="3"/>
@@ -2171,6 +2158,7 @@
               <a:rPr lang="en-US" smtClean="0"/>
               <a:t>Fourth level</a:t>
             </a:r>
+            <a:endParaRPr lang="en-US" smtClean="0"/>
           </a:p>
           <a:p>
             <a:pPr lvl="4"/>
@@ -2244,6 +2232,7 @@
               <a:rPr lang="en-US" smtClean="0"/>
               <a:t>Click to edit Master text styles</a:t>
             </a:r>
+            <a:endParaRPr lang="en-US" smtClean="0"/>
           </a:p>
         </p:txBody>
       </p:sp>
@@ -2264,7 +2253,6 @@
           <a:p>
             <a:fld id="{5BCAD085-E8A6-8845-BD4E-CB4CCA059FC4}" type="datetimeFigureOut">
               <a:rPr lang="en-US" smtClean="0"/>
-              <a:t>1/27/13</a:t>
             </a:fld>
             <a:endParaRPr lang="en-US"/>
           </a:p>
@@ -2306,18 +2294,12 @@
           <a:p>
             <a:fld id="{C1FF6DA9-008F-8B48-92A6-B652298478BF}" type="slidenum">
               <a:rPr lang="en-US" smtClean="0"/>
-              <a:t>‹#›</a:t>
             </a:fld>
             <a:endParaRPr lang="en-US"/>
           </a:p>
         </p:txBody>
       </p:sp>
     </p:spTree>
-    <p:extLst>
-      <p:ext uri="{BB962C8B-B14F-4D97-AF65-F5344CB8AC3E}">
-        <p14:creationId xmlns:p14="http://schemas.microsoft.com/office/powerpoint/2010/main" val="1840726560"/>
-      </p:ext>
-    </p:extLst>
   </p:cSld>
   <p:clrMapOvr>
     <a:masterClrMapping/>
@@ -2497,6 +2479,7 @@
               <a:rPr lang="en-US" smtClean="0"/>
               <a:t>Click to edit Master text styles</a:t>
             </a:r>
+            <a:endParaRPr lang="en-US" smtClean="0"/>
           </a:p>
         </p:txBody>
       </p:sp>
@@ -2517,7 +2500,6 @@
           <a:p>
             <a:fld id="{5BCAD085-E8A6-8845-BD4E-CB4CCA059FC4}" type="datetimeFigureOut">
               <a:rPr lang="en-US" smtClean="0"/>
-              <a:t>1/27/13</a:t>
             </a:fld>
             <a:endParaRPr lang="en-US"/>
           </a:p>
@@ -2559,18 +2541,12 @@
           <a:p>
             <a:fld id="{C1FF6DA9-008F-8B48-92A6-B652298478BF}" type="slidenum">
               <a:rPr lang="en-US" smtClean="0"/>
-              <a:t>‹#›</a:t>
             </a:fld>
             <a:endParaRPr lang="en-US"/>
           </a:p>
         </p:txBody>
       </p:sp>
     </p:spTree>
-    <p:extLst>
-      <p:ext uri="{BB962C8B-B14F-4D97-AF65-F5344CB8AC3E}">
-        <p14:creationId xmlns:p14="http://schemas.microsoft.com/office/powerpoint/2010/main" val="3889236939"/>
-      </p:ext>
-    </p:extLst>
   </p:cSld>
   <p:clrMapOvr>
     <a:masterClrMapping/>
@@ -2663,6 +2639,7 @@
               <a:rPr lang="en-US" smtClean="0"/>
               <a:t>Click to edit Master text styles</a:t>
             </a:r>
+            <a:endParaRPr lang="en-US" smtClean="0"/>
           </a:p>
           <a:p>
             <a:pPr lvl="1"/>
@@ -2670,6 +2647,7 @@
               <a:rPr lang="en-US" smtClean="0"/>
               <a:t>Second level</a:t>
             </a:r>
+            <a:endParaRPr lang="en-US" smtClean="0"/>
           </a:p>
           <a:p>
             <a:pPr lvl="2"/>
@@ -2677,6 +2655,7 @@
               <a:rPr lang="en-US" smtClean="0"/>
               <a:t>Third level</a:t>
             </a:r>
+            <a:endParaRPr lang="en-US" smtClean="0"/>
           </a:p>
           <a:p>
             <a:pPr lvl="3"/>
@@ -2684,6 +2663,7 @@
               <a:rPr lang="en-US" smtClean="0"/>
               <a:t>Fourth level</a:t>
             </a:r>
+            <a:endParaRPr lang="en-US" smtClean="0"/>
           </a:p>
           <a:p>
             <a:pPr lvl="4"/>
@@ -2730,7 +2710,6 @@
           <a:p>
             <a:fld id="{5BCAD085-E8A6-8845-BD4E-CB4CCA059FC4}" type="datetimeFigureOut">
               <a:rPr lang="en-US" smtClean="0"/>
-              <a:t>1/27/13</a:t>
             </a:fld>
             <a:endParaRPr lang="en-US"/>
           </a:p>
@@ -2808,18 +2787,12 @@
           <a:p>
             <a:fld id="{C1FF6DA9-008F-8B48-92A6-B652298478BF}" type="slidenum">
               <a:rPr lang="en-US" smtClean="0"/>
-              <a:t>‹#›</a:t>
             </a:fld>
             <a:endParaRPr lang="en-US"/>
           </a:p>
         </p:txBody>
       </p:sp>
     </p:spTree>
-    <p:extLst>
-      <p:ext uri="{BB962C8B-B14F-4D97-AF65-F5344CB8AC3E}">
-        <p14:creationId xmlns:p14="http://schemas.microsoft.com/office/powerpoint/2010/main" val="2209977519"/>
-      </p:ext>
-    </p:extLst>
   </p:cSld>
   <p:clrMap bg1="lt1" tx1="dk1" bg2="lt2" tx2="dk2" accent1="accent1" accent2="accent2" accent3="accent3" accent4="accent4" accent5="accent5" accent6="accent6" hlink="hlink" folHlink="folHlink"/>
   <p:sldLayoutIdLst>
@@ -2857,7 +2830,7 @@
         <a:spcBef>
           <a:spcPct val="20000"/>
         </a:spcBef>
-        <a:buFont typeface="Arial"/>
+        <a:buFont typeface="Arial" panose="020B0604020202020204"/>
         <a:buChar char="•"/>
         <a:defRPr sz="3200" kern="1200">
           <a:solidFill>
@@ -2872,7 +2845,7 @@
         <a:spcBef>
           <a:spcPct val="20000"/>
         </a:spcBef>
-        <a:buFont typeface="Arial"/>
+        <a:buFont typeface="Arial" panose="020B0604020202020204"/>
         <a:buChar char="–"/>
         <a:defRPr sz="2800" kern="1200">
           <a:solidFill>
@@ -2887,7 +2860,7 @@
         <a:spcBef>
           <a:spcPct val="20000"/>
         </a:spcBef>
-        <a:buFont typeface="Arial"/>
+        <a:buFont typeface="Arial" panose="020B0604020202020204"/>
         <a:buChar char="•"/>
         <a:defRPr sz="2400" kern="1200">
           <a:solidFill>
@@ -2902,7 +2875,7 @@
         <a:spcBef>
           <a:spcPct val="20000"/>
         </a:spcBef>
-        <a:buFont typeface="Arial"/>
+        <a:buFont typeface="Arial" panose="020B0604020202020204"/>
         <a:buChar char="–"/>
         <a:defRPr sz="2000" kern="1200">
           <a:solidFill>
@@ -2917,7 +2890,7 @@
         <a:spcBef>
           <a:spcPct val="20000"/>
         </a:spcBef>
-        <a:buFont typeface="Arial"/>
+        <a:buFont typeface="Arial" panose="020B0604020202020204"/>
         <a:buChar char="»"/>
         <a:defRPr sz="2000" kern="1200">
           <a:solidFill>
@@ -2932,7 +2905,7 @@
         <a:spcBef>
           <a:spcPct val="20000"/>
         </a:spcBef>
-        <a:buFont typeface="Arial"/>
+        <a:buFont typeface="Arial" panose="020B0604020202020204"/>
         <a:buChar char="•"/>
         <a:defRPr sz="2000" kern="1200">
           <a:solidFill>
@@ -2947,7 +2920,7 @@
         <a:spcBef>
           <a:spcPct val="20000"/>
         </a:spcBef>
-        <a:buFont typeface="Arial"/>
+        <a:buFont typeface="Arial" panose="020B0604020202020204"/>
         <a:buChar char="•"/>
         <a:defRPr sz="2000" kern="1200">
           <a:solidFill>
@@ -2962,7 +2935,7 @@
         <a:spcBef>
           <a:spcPct val="20000"/>
         </a:spcBef>
-        <a:buFont typeface="Arial"/>
+        <a:buFont typeface="Arial" panose="020B0604020202020204"/>
         <a:buChar char="•"/>
         <a:defRPr sz="2000" kern="1200">
           <a:solidFill>
@@ -2977,7 +2950,7 @@
         <a:spcBef>
           <a:spcPct val="20000"/>
         </a:spcBef>
-        <a:buFont typeface="Arial"/>
+        <a:buFont typeface="Arial" panose="020B0604020202020204"/>
         <a:buChar char="•"/>
         <a:defRPr sz="2000" kern="1200">
           <a:solidFill>
@@ -3089,7 +3062,7 @@
 </file>
 
 <file path=ppt/slides/slide1.xml><?xml version="1.0" encoding="utf-8"?>
-<p:sld xmlns:a="http://schemas.openxmlformats.org/drawingml/2006/main" xmlns:p="http://schemas.openxmlformats.org/presentationml/2006/main" xmlns:r="http://schemas.openxmlformats.org/officeDocument/2006/relationships">
+<p:sld xmlns:a="http://schemas.openxmlformats.org/drawingml/2006/main" xmlns:r="http://schemas.openxmlformats.org/officeDocument/2006/relationships" xmlns:p="http://schemas.openxmlformats.org/presentationml/2006/main">
   <p:cSld>
     <p:bg>
       <p:bgPr>
@@ -3145,7 +3118,7 @@
           </a:fontRef>
         </p:style>
         <p:txBody>
-          <a:bodyPr rtlCol="0" anchor="ctr" wrap="square" lIns="54864" rIns="54864" tIns="27432" bIns="27432"/>
+          <a:bodyPr wrap="square" lIns="54864" tIns="27432" rIns="54864" bIns="27432" rtlCol="0" anchor="ctr"/>
           <a:lstStyle/>
           <a:p>
             <a:pPr algn="ctr">
@@ -3158,10 +3131,16 @@
                 <a:solidFill>
                   <a:srgbClr val="0A564A"/>
                 </a:solidFill>
-                <a:latin typeface="Microsoft YaHei"/>
+                <a:latin typeface="微软雅黑" panose="020B0503020204020204" charset="-122"/>
               </a:rPr>
               <a:t>E</a:t>
             </a:r>
+            <a:endParaRPr sz="2800" b="1">
+              <a:solidFill>
+                <a:srgbClr val="0A564A"/>
+              </a:solidFill>
+              <a:latin typeface="微软雅黑" panose="020B0503020204020204" charset="-122"/>
+            </a:endParaRPr>
           </a:p>
         </p:txBody>
       </p:sp>
@@ -3182,7 +3161,7 @@
           <a:noFill/>
         </p:spPr>
         <p:txBody>
-          <a:bodyPr wrap="square" anchor="t" lIns="0" rIns="0" tIns="0" bIns="0">
+          <a:bodyPr wrap="square" lIns="0" tIns="0" rIns="0" bIns="0" anchor="t">
             <a:spAutoFit/>
           </a:bodyPr>
           <a:lstStyle/>
@@ -3203,10 +3182,16 @@
                 <a:solidFill>
                   <a:srgbClr val="17B897"/>
                 </a:solidFill>
-                <a:latin typeface="Microsoft YaHei"/>
+                <a:latin typeface="微软雅黑" panose="020B0503020204020204" charset="-122"/>
               </a:rPr>
               <a:t>AI HEALTH NAVIGATOR · 团队招募</a:t>
             </a:r>
+            <a:endParaRPr sz="1400" b="1">
+              <a:solidFill>
+                <a:srgbClr val="17B897"/>
+              </a:solidFill>
+              <a:latin typeface="微软雅黑" panose="020B0503020204020204" charset="-122"/>
+            </a:endParaRPr>
           </a:p>
         </p:txBody>
       </p:sp>
@@ -3227,7 +3212,7 @@
           <a:noFill/>
         </p:spPr>
         <p:txBody>
-          <a:bodyPr wrap="square" anchor="t" lIns="0" rIns="0" tIns="0" bIns="0">
+          <a:bodyPr wrap="square" lIns="0" tIns="0" rIns="0" bIns="0" anchor="t">
             <a:spAutoFit/>
           </a:bodyPr>
           <a:lstStyle/>
@@ -3248,10 +3233,16 @@
                 <a:solidFill>
                   <a:srgbClr val="FFFFFF"/>
                 </a:solidFill>
-                <a:latin typeface="Microsoft YaHei"/>
+                <a:latin typeface="微软雅黑" panose="020B0503020204020204" charset="-122"/>
               </a:rPr>
               <a:t>AI Health Navigator</a:t>
             </a:r>
+            <a:endParaRPr sz="4800" b="1">
+              <a:solidFill>
+                <a:srgbClr val="FFFFFF"/>
+              </a:solidFill>
+              <a:latin typeface="微软雅黑" panose="020B0503020204020204" charset="-122"/>
+            </a:endParaRPr>
           </a:p>
         </p:txBody>
       </p:sp>
@@ -3272,7 +3263,7 @@
           <a:noFill/>
         </p:spPr>
         <p:txBody>
-          <a:bodyPr wrap="square" anchor="t" lIns="0" rIns="0" tIns="0" bIns="0">
+          <a:bodyPr wrap="square" lIns="0" tIns="0" rIns="0" bIns="0" anchor="t">
             <a:spAutoFit/>
           </a:bodyPr>
           <a:lstStyle/>
@@ -3293,10 +3284,16 @@
                 <a:solidFill>
                   <a:srgbClr val="B8E4DA"/>
                 </a:solidFill>
-                <a:latin typeface="Microsoft YaHei"/>
+                <a:latin typeface="微软雅黑" panose="020B0503020204020204" charset="-122"/>
               </a:rPr>
               <a:t>把日常健康的不确定性，连接到专业医疗。</a:t>
             </a:r>
+            <a:endParaRPr sz="2200" b="0">
+              <a:solidFill>
+                <a:srgbClr val="B8E4DA"/>
+              </a:solidFill>
+              <a:latin typeface="微软雅黑" panose="020B0503020204020204" charset="-122"/>
+            </a:endParaRPr>
           </a:p>
         </p:txBody>
       </p:sp>
@@ -3339,7 +3336,7 @@
           </a:fontRef>
         </p:style>
         <p:txBody>
-          <a:bodyPr rtlCol="0" anchor="ctr" wrap="square" lIns="54864" rIns="54864" tIns="27432" bIns="27432"/>
+          <a:bodyPr wrap="square" lIns="54864" tIns="27432" rIns="54864" bIns="27432" rtlCol="0" anchor="ctr"/>
           <a:lstStyle/>
           <a:p>
             <a:pPr algn="ctr">
@@ -3352,10 +3349,16 @@
                 <a:solidFill>
                   <a:srgbClr val="0A564A"/>
                 </a:solidFill>
-                <a:latin typeface="Microsoft YaHei"/>
+                <a:latin typeface="微软雅黑" panose="020B0503020204020204" charset="-122"/>
               </a:rPr>
               <a:t>已完成一个可交互 Web Demo 原型 —— 就差你了</a:t>
             </a:r>
+            <a:endParaRPr sz="1700" b="1">
+              <a:solidFill>
+                <a:srgbClr val="0A564A"/>
+              </a:solidFill>
+              <a:latin typeface="微软雅黑" panose="020B0503020204020204" charset="-122"/>
+            </a:endParaRPr>
           </a:p>
         </p:txBody>
       </p:sp>
@@ -3420,7 +3423,7 @@
           <a:noFill/>
         </p:spPr>
         <p:txBody>
-          <a:bodyPr wrap="square" anchor="t" lIns="0" rIns="0" tIns="0" bIns="0">
+          <a:bodyPr wrap="square" lIns="0" tIns="0" rIns="0" bIns="0" anchor="t">
             <a:spAutoFit/>
           </a:bodyPr>
           <a:lstStyle/>
@@ -3441,10 +3444,16 @@
                 <a:solidFill>
                   <a:srgbClr val="17B897"/>
                 </a:solidFill>
-                <a:latin typeface="Microsoft YaHei"/>
+                <a:latin typeface="微软雅黑" panose="020B0503020204020204" charset="-122"/>
               </a:rPr>
               <a:t>We don't replace doctors. We connect everyday health uncertainty with professional care.</a:t>
             </a:r>
+            <a:endParaRPr sz="1500" b="0">
+              <a:solidFill>
+                <a:srgbClr val="17B897"/>
+              </a:solidFill>
+              <a:latin typeface="微软雅黑" panose="020B0503020204020204" charset="-122"/>
+            </a:endParaRPr>
           </a:p>
         </p:txBody>
       </p:sp>
@@ -3457,7 +3466,7 @@
 </file>
 
 <file path=ppt/slides/slide10.xml><?xml version="1.0" encoding="utf-8"?>
-<p:sld xmlns:a="http://schemas.openxmlformats.org/drawingml/2006/main" xmlns:p="http://schemas.openxmlformats.org/presentationml/2006/main" xmlns:r="http://schemas.openxmlformats.org/officeDocument/2006/relationships">
+<p:sld xmlns:a="http://schemas.openxmlformats.org/drawingml/2006/main" xmlns:r="http://schemas.openxmlformats.org/officeDocument/2006/relationships" xmlns:p="http://schemas.openxmlformats.org/presentationml/2006/main">
   <p:cSld>
     <p:bg>
       <p:bgPr>
@@ -3535,7 +3544,7 @@
           <a:noFill/>
         </p:spPr>
         <p:txBody>
-          <a:bodyPr wrap="square" anchor="t" lIns="0" rIns="0" tIns="0" bIns="0">
+          <a:bodyPr wrap="square" lIns="0" tIns="0" rIns="0" bIns="0" anchor="t">
             <a:spAutoFit/>
           </a:bodyPr>
           <a:lstStyle/>
@@ -3556,10 +3565,16 @@
                 <a:solidFill>
                   <a:srgbClr val="0D6B5C"/>
                 </a:solidFill>
-                <a:latin typeface="Microsoft YaHei"/>
+                <a:latin typeface="微软雅黑" panose="020B0503020204020204" charset="-122"/>
               </a:rPr>
               <a:t>09 · 为什么加入</a:t>
             </a:r>
+            <a:endParaRPr sz="1300" b="1">
+              <a:solidFill>
+                <a:srgbClr val="0D6B5C"/>
+              </a:solidFill>
+              <a:latin typeface="微软雅黑" panose="020B0503020204020204" charset="-122"/>
+            </a:endParaRPr>
           </a:p>
         </p:txBody>
       </p:sp>
@@ -3580,7 +3595,7 @@
           <a:noFill/>
         </p:spPr>
         <p:txBody>
-          <a:bodyPr wrap="square" anchor="t" lIns="0" rIns="0" tIns="0" bIns="0">
+          <a:bodyPr wrap="square" lIns="0" tIns="0" rIns="0" bIns="0" anchor="t">
             <a:spAutoFit/>
           </a:bodyPr>
           <a:lstStyle/>
@@ -3601,10 +3616,16 @@
                 <a:solidFill>
                   <a:srgbClr val="10222B"/>
                 </a:solidFill>
-                <a:latin typeface="Microsoft YaHei"/>
+                <a:latin typeface="微软雅黑" panose="020B0503020204020204" charset="-122"/>
               </a:rPr>
               <a:t>你能带走什么</a:t>
             </a:r>
+            <a:endParaRPr sz="3100" b="1">
+              <a:solidFill>
+                <a:srgbClr val="10222B"/>
+              </a:solidFill>
+              <a:latin typeface="微软雅黑" panose="020B0503020204020204" charset="-122"/>
+            </a:endParaRPr>
           </a:p>
         </p:txBody>
       </p:sp>
@@ -3673,7 +3694,7 @@
           <a:noFill/>
         </p:spPr>
         <p:txBody>
-          <a:bodyPr wrap="square" anchor="t" lIns="0" rIns="0" tIns="0" bIns="0">
+          <a:bodyPr wrap="square" lIns="0" tIns="0" rIns="0" bIns="0" anchor="t">
             <a:spAutoFit/>
           </a:bodyPr>
           <a:lstStyle/>
@@ -3694,10 +3715,16 @@
                 <a:solidFill>
                   <a:srgbClr val="0D6B5C"/>
                 </a:solidFill>
-                <a:latin typeface="Microsoft YaHei"/>
+                <a:latin typeface="微软雅黑" panose="020B0503020204020204" charset="-122"/>
               </a:rPr>
               <a:t>0 → 1 的完整经历</a:t>
             </a:r>
+            <a:endParaRPr sz="1700" b="1">
+              <a:solidFill>
+                <a:srgbClr val="0D6B5C"/>
+              </a:solidFill>
+              <a:latin typeface="微软雅黑" panose="020B0503020204020204" charset="-122"/>
+            </a:endParaRPr>
           </a:p>
         </p:txBody>
       </p:sp>
@@ -3718,7 +3745,7 @@
           <a:noFill/>
         </p:spPr>
         <p:txBody>
-          <a:bodyPr wrap="square" anchor="t" lIns="0" rIns="0" tIns="0" bIns="0">
+          <a:bodyPr wrap="square" lIns="0" tIns="0" rIns="0" bIns="0" anchor="t">
             <a:spAutoFit/>
           </a:bodyPr>
           <a:lstStyle/>
@@ -3739,10 +3766,16 @@
                 <a:solidFill>
                   <a:srgbClr val="4A5B64"/>
                 </a:solidFill>
-                <a:latin typeface="Microsoft YaHei"/>
+                <a:latin typeface="微软雅黑" panose="020B0503020204020204" charset="-122"/>
               </a:rPr>
               <a:t>从想法、Demo 到真实用户，全程参与，不是打杂。</a:t>
             </a:r>
+            <a:endParaRPr sz="1350" b="0">
+              <a:solidFill>
+                <a:srgbClr val="4A5B64"/>
+              </a:solidFill>
+              <a:latin typeface="微软雅黑" panose="020B0503020204020204" charset="-122"/>
+            </a:endParaRPr>
           </a:p>
         </p:txBody>
       </p:sp>
@@ -3811,7 +3844,7 @@
           <a:noFill/>
         </p:spPr>
         <p:txBody>
-          <a:bodyPr wrap="square" anchor="t" lIns="0" rIns="0" tIns="0" bIns="0">
+          <a:bodyPr wrap="square" lIns="0" tIns="0" rIns="0" bIns="0" anchor="t">
             <a:spAutoFit/>
           </a:bodyPr>
           <a:lstStyle/>
@@ -3832,10 +3865,16 @@
                 <a:solidFill>
                   <a:srgbClr val="0D6B5C"/>
                 </a:solidFill>
-                <a:latin typeface="Microsoft YaHei"/>
+                <a:latin typeface="微软雅黑" panose="020B0503020204020204" charset="-122"/>
               </a:rPr>
               <a:t>跨背景协作</a:t>
             </a:r>
+            <a:endParaRPr sz="1700" b="1">
+              <a:solidFill>
+                <a:srgbClr val="0D6B5C"/>
+              </a:solidFill>
+              <a:latin typeface="微软雅黑" panose="020B0503020204020204" charset="-122"/>
+            </a:endParaRPr>
           </a:p>
         </p:txBody>
       </p:sp>
@@ -3856,7 +3895,7 @@
           <a:noFill/>
         </p:spPr>
         <p:txBody>
-          <a:bodyPr wrap="square" anchor="t" lIns="0" rIns="0" tIns="0" bIns="0">
+          <a:bodyPr wrap="square" lIns="0" tIns="0" rIns="0" bIns="0" anchor="t">
             <a:spAutoFit/>
           </a:bodyPr>
           <a:lstStyle/>
@@ -3877,10 +3916,16 @@
                 <a:solidFill>
                   <a:srgbClr val="4A5B64"/>
                 </a:solidFill>
-                <a:latin typeface="Microsoft YaHei"/>
+                <a:latin typeface="微软雅黑" panose="020B0503020204020204" charset="-122"/>
               </a:rPr>
               <a:t>产品 × AI × 医学 × 设计，学会与不同的人一起做产品。</a:t>
             </a:r>
+            <a:endParaRPr sz="1350" b="0">
+              <a:solidFill>
+                <a:srgbClr val="4A5B64"/>
+              </a:solidFill>
+              <a:latin typeface="微软雅黑" panose="020B0503020204020204" charset="-122"/>
+            </a:endParaRPr>
           </a:p>
         </p:txBody>
       </p:sp>
@@ -3949,7 +3994,7 @@
           <a:noFill/>
         </p:spPr>
         <p:txBody>
-          <a:bodyPr wrap="square" anchor="t" lIns="0" rIns="0" tIns="0" bIns="0">
+          <a:bodyPr wrap="square" lIns="0" tIns="0" rIns="0" bIns="0" anchor="t">
             <a:spAutoFit/>
           </a:bodyPr>
           <a:lstStyle/>
@@ -3970,10 +4015,16 @@
                 <a:solidFill>
                   <a:srgbClr val="0D6B5C"/>
                 </a:solidFill>
-                <a:latin typeface="Microsoft YaHei"/>
+                <a:latin typeface="微软雅黑" panose="020B0503020204020204" charset="-122"/>
               </a:rPr>
               <a:t>可长期的方向</a:t>
             </a:r>
+            <a:endParaRPr sz="1700" b="1">
+              <a:solidFill>
+                <a:srgbClr val="0D6B5C"/>
+              </a:solidFill>
+              <a:latin typeface="微软雅黑" panose="020B0503020204020204" charset="-122"/>
+            </a:endParaRPr>
           </a:p>
         </p:txBody>
       </p:sp>
@@ -3994,7 +4045,7 @@
           <a:noFill/>
         </p:spPr>
         <p:txBody>
-          <a:bodyPr wrap="square" anchor="t" lIns="0" rIns="0" tIns="0" bIns="0">
+          <a:bodyPr wrap="square" lIns="0" tIns="0" rIns="0" bIns="0" anchor="t">
             <a:spAutoFit/>
           </a:bodyPr>
           <a:lstStyle/>
@@ -4015,10 +4066,16 @@
                 <a:solidFill>
                   <a:srgbClr val="4A5B64"/>
                 </a:solidFill>
-                <a:latin typeface="Microsoft YaHei"/>
+                <a:latin typeface="微软雅黑" panose="020B0503020204020204" charset="-122"/>
               </a:rPr>
               <a:t>可发展为创业、科研或竞赛项目，不是一次性作业。</a:t>
             </a:r>
+            <a:endParaRPr sz="1350" b="0">
+              <a:solidFill>
+                <a:srgbClr val="4A5B64"/>
+              </a:solidFill>
+              <a:latin typeface="微软雅黑" panose="020B0503020204020204" charset="-122"/>
+            </a:endParaRPr>
           </a:p>
         </p:txBody>
       </p:sp>
@@ -4039,7 +4096,7 @@
           <a:noFill/>
         </p:spPr>
         <p:txBody>
-          <a:bodyPr wrap="square" anchor="t" lIns="0" rIns="0" tIns="0" bIns="0">
+          <a:bodyPr wrap="square" lIns="0" tIns="0" rIns="0" bIns="0" anchor="t">
             <a:spAutoFit/>
           </a:bodyPr>
           <a:lstStyle/>
@@ -4060,10 +4117,16 @@
                 <a:solidFill>
                   <a:srgbClr val="8A99A2"/>
                 </a:solidFill>
-                <a:latin typeface="Microsoft YaHei"/>
+                <a:latin typeface="微软雅黑" panose="020B0503020204020204" charset="-122"/>
               </a:rPr>
               <a:t>AI Health Navigator · 团队招募</a:t>
             </a:r>
+            <a:endParaRPr sz="1000" b="0">
+              <a:solidFill>
+                <a:srgbClr val="8A99A2"/>
+              </a:solidFill>
+              <a:latin typeface="微软雅黑" panose="020B0503020204020204" charset="-122"/>
+            </a:endParaRPr>
           </a:p>
         </p:txBody>
       </p:sp>
@@ -4084,7 +4147,7 @@
           <a:noFill/>
         </p:spPr>
         <p:txBody>
-          <a:bodyPr wrap="square" anchor="t" lIns="0" rIns="0" tIns="0" bIns="0">
+          <a:bodyPr wrap="square" lIns="0" tIns="0" rIns="0" bIns="0" anchor="t">
             <a:spAutoFit/>
           </a:bodyPr>
           <a:lstStyle/>
@@ -4105,10 +4168,16 @@
                 <a:solidFill>
                   <a:srgbClr val="4A5B64"/>
                 </a:solidFill>
-                <a:latin typeface="Microsoft YaHei"/>
+                <a:latin typeface="微软雅黑" panose="020B0503020204020204" charset="-122"/>
               </a:rPr>
               <a:t>10</a:t>
             </a:r>
+            <a:endParaRPr sz="1100" b="1">
+              <a:solidFill>
+                <a:srgbClr val="4A5B64"/>
+              </a:solidFill>
+              <a:latin typeface="微软雅黑" panose="020B0503020204020204" charset="-122"/>
+            </a:endParaRPr>
           </a:p>
         </p:txBody>
       </p:sp>
@@ -4121,7 +4190,7 @@
 </file>
 
 <file path=ppt/slides/slide11.xml><?xml version="1.0" encoding="utf-8"?>
-<p:sld xmlns:a="http://schemas.openxmlformats.org/drawingml/2006/main" xmlns:p="http://schemas.openxmlformats.org/presentationml/2006/main" xmlns:r="http://schemas.openxmlformats.org/officeDocument/2006/relationships">
+<p:sld xmlns:a="http://schemas.openxmlformats.org/drawingml/2006/main" xmlns:r="http://schemas.openxmlformats.org/officeDocument/2006/relationships" xmlns:p="http://schemas.openxmlformats.org/presentationml/2006/main">
   <p:cSld>
     <p:bg>
       <p:bgPr>
@@ -4199,7 +4268,7 @@
           <a:noFill/>
         </p:spPr>
         <p:txBody>
-          <a:bodyPr wrap="square" anchor="t" lIns="0" rIns="0" tIns="0" bIns="0">
+          <a:bodyPr wrap="square" lIns="0" tIns="0" rIns="0" bIns="0" anchor="t">
             <a:spAutoFit/>
           </a:bodyPr>
           <a:lstStyle/>
@@ -4220,10 +4289,16 @@
                 <a:solidFill>
                   <a:srgbClr val="0D6B5C"/>
                 </a:solidFill>
-                <a:latin typeface="Microsoft YaHei"/>
+                <a:latin typeface="微软雅黑" panose="020B0503020204020204" charset="-122"/>
               </a:rPr>
               <a:t>10 · Apply</a:t>
             </a:r>
+            <a:endParaRPr sz="1300" b="1">
+              <a:solidFill>
+                <a:srgbClr val="0D6B5C"/>
+              </a:solidFill>
+              <a:latin typeface="微软雅黑" panose="020B0503020204020204" charset="-122"/>
+            </a:endParaRPr>
           </a:p>
         </p:txBody>
       </p:sp>
@@ -4244,7 +4319,7 @@
           <a:noFill/>
         </p:spPr>
         <p:txBody>
-          <a:bodyPr wrap="square" anchor="t" lIns="0" rIns="0" tIns="0" bIns="0">
+          <a:bodyPr wrap="square" lIns="0" tIns="0" rIns="0" bIns="0" anchor="t">
             <a:spAutoFit/>
           </a:bodyPr>
           <a:lstStyle/>
@@ -4265,10 +4340,16 @@
                 <a:solidFill>
                   <a:srgbClr val="10222B"/>
                 </a:solidFill>
-                <a:latin typeface="Microsoft YaHei"/>
+                <a:latin typeface="微软雅黑" panose="020B0503020204020204" charset="-122"/>
               </a:rPr>
               <a:t>如何加入</a:t>
             </a:r>
+            <a:endParaRPr sz="3100" b="1">
+              <a:solidFill>
+                <a:srgbClr val="10222B"/>
+              </a:solidFill>
+              <a:latin typeface="微软雅黑" panose="020B0503020204020204" charset="-122"/>
+            </a:endParaRPr>
           </a:p>
         </p:txBody>
       </p:sp>
@@ -4289,7 +4370,7 @@
           <a:noFill/>
         </p:spPr>
         <p:txBody>
-          <a:bodyPr wrap="square" anchor="t" lIns="0" rIns="0" tIns="0" bIns="0">
+          <a:bodyPr wrap="square" lIns="0" tIns="0" rIns="0" bIns="0" anchor="t">
             <a:spAutoFit/>
           </a:bodyPr>
           <a:lstStyle/>
@@ -4310,7 +4391,7 @@
                 <a:solidFill>
                   <a:srgbClr val="10222B"/>
                 </a:solidFill>
-                <a:latin typeface="Microsoft YaHei"/>
+                <a:latin typeface="微软雅黑" panose="020B0503020204020204" charset="-122"/>
               </a:rPr>
               <a:t>团队规模：</a:t>
             </a:r>
@@ -4319,10 +4400,16 @@
                 <a:solidFill>
                   <a:srgbClr val="10222B"/>
                 </a:solidFill>
-                <a:latin typeface="Microsoft YaHei"/>
+                <a:latin typeface="微软雅黑" panose="020B0503020204020204" charset="-122"/>
               </a:rPr>
               <a:t>5–6 人，小而精。</a:t>
             </a:r>
+            <a:endParaRPr sz="1600" b="0">
+              <a:solidFill>
+                <a:srgbClr val="10222B"/>
+              </a:solidFill>
+              <a:latin typeface="微软雅黑" panose="020B0503020204020204" charset="-122"/>
+            </a:endParaRPr>
           </a:p>
         </p:txBody>
       </p:sp>
@@ -4343,7 +4430,7 @@
           <a:noFill/>
         </p:spPr>
         <p:txBody>
-          <a:bodyPr wrap="square" anchor="t" lIns="0" rIns="0" tIns="0" bIns="0">
+          <a:bodyPr wrap="square" lIns="0" tIns="0" rIns="0" bIns="0" anchor="t">
             <a:spAutoFit/>
           </a:bodyPr>
           <a:lstStyle/>
@@ -4364,10 +4451,16 @@
                 <a:solidFill>
                   <a:srgbClr val="10222B"/>
                 </a:solidFill>
-                <a:latin typeface="Microsoft YaHei"/>
+                <a:latin typeface="微软雅黑" panose="020B0503020204020204" charset="-122"/>
               </a:rPr>
               <a:t>申请方式：</a:t>
             </a:r>
+            <a:endParaRPr sz="1600" b="1">
+              <a:solidFill>
+                <a:srgbClr val="10222B"/>
+              </a:solidFill>
+              <a:latin typeface="微软雅黑" panose="020B0503020204020204" charset="-122"/>
+            </a:endParaRPr>
           </a:p>
         </p:txBody>
       </p:sp>
@@ -4388,7 +4481,7 @@
           <a:noFill/>
         </p:spPr>
         <p:txBody>
-          <a:bodyPr wrap="square" anchor="t" lIns="0" rIns="0" tIns="0" bIns="0">
+          <a:bodyPr wrap="square" lIns="0" tIns="0" rIns="0" bIns="0" anchor="t">
             <a:spAutoFit/>
           </a:bodyPr>
           <a:lstStyle/>
@@ -4409,10 +4502,16 @@
                 <a:solidFill>
                   <a:srgbClr val="4A5B64"/>
                 </a:solidFill>
-                <a:latin typeface="Microsoft YaHei"/>
+                <a:latin typeface="微软雅黑" panose="020B0503020204020204" charset="-122"/>
               </a:rPr>
               <a:t>填写报名表（含一道开放题），我们会尽快与你聊一聊。</a:t>
             </a:r>
+            <a:endParaRPr sz="1450" b="0">
+              <a:solidFill>
+                <a:srgbClr val="4A5B64"/>
+              </a:solidFill>
+              <a:latin typeface="微软雅黑" panose="020B0503020204020204" charset="-122"/>
+            </a:endParaRPr>
           </a:p>
         </p:txBody>
       </p:sp>
@@ -4479,7 +4578,7 @@
           <a:noFill/>
         </p:spPr>
         <p:txBody>
-          <a:bodyPr wrap="square" anchor="t" lIns="0" rIns="0" tIns="0" bIns="0">
+          <a:bodyPr wrap="square" lIns="0" tIns="0" rIns="0" bIns="0" anchor="t">
             <a:spAutoFit/>
           </a:bodyPr>
           <a:lstStyle/>
@@ -4500,10 +4599,16 @@
                 <a:solidFill>
                   <a:srgbClr val="0D6B5C"/>
                 </a:solidFill>
-                <a:latin typeface="Microsoft YaHei"/>
+                <a:latin typeface="微软雅黑" panose="020B0503020204020204" charset="-122"/>
               </a:rPr>
               <a:t>开放题</a:t>
             </a:r>
+            <a:endParaRPr sz="1250" b="1">
+              <a:solidFill>
+                <a:srgbClr val="0D6B5C"/>
+              </a:solidFill>
+              <a:latin typeface="微软雅黑" panose="020B0503020204020204" charset="-122"/>
+            </a:endParaRPr>
           </a:p>
         </p:txBody>
       </p:sp>
@@ -4524,7 +4629,7 @@
           <a:noFill/>
         </p:spPr>
         <p:txBody>
-          <a:bodyPr wrap="square" anchor="t" lIns="0" rIns="0" tIns="0" bIns="0">
+          <a:bodyPr wrap="square" lIns="0" tIns="0" rIns="0" bIns="0" anchor="t">
             <a:spAutoFit/>
           </a:bodyPr>
           <a:lstStyle/>
@@ -4545,10 +4650,16 @@
                 <a:solidFill>
                   <a:srgbClr val="10222B"/>
                 </a:solidFill>
-                <a:latin typeface="Microsoft YaHei"/>
+                <a:latin typeface="微软雅黑" panose="020B0503020204020204" charset="-122"/>
               </a:rPr>
               <a:t>“如果由你设计这个产品，你最想解决的一个问题是什么？”</a:t>
             </a:r>
+            <a:endParaRPr sz="2000" b="1">
+              <a:solidFill>
+                <a:srgbClr val="10222B"/>
+              </a:solidFill>
+              <a:latin typeface="微软雅黑" panose="020B0503020204020204" charset="-122"/>
+            </a:endParaRPr>
           </a:p>
         </p:txBody>
       </p:sp>
@@ -4569,7 +4680,7 @@
           <a:noFill/>
         </p:spPr>
         <p:txBody>
-          <a:bodyPr wrap="square" anchor="t" lIns="0" rIns="0" tIns="0" bIns="0">
+          <a:bodyPr wrap="square" lIns="0" tIns="0" rIns="0" bIns="0" anchor="t">
             <a:spAutoFit/>
           </a:bodyPr>
           <a:lstStyle/>
@@ -4590,10 +4701,16 @@
                 <a:solidFill>
                   <a:srgbClr val="0D6B5C"/>
                 </a:solidFill>
-                <a:latin typeface="Microsoft YaHei"/>
+                <a:latin typeface="微软雅黑" panose="020B0503020204020204" charset="-122"/>
               </a:rPr>
               <a:t>期待与你一起，从 0 做到 1。</a:t>
             </a:r>
+            <a:endParaRPr sz="1400" b="1">
+              <a:solidFill>
+                <a:srgbClr val="0D6B5C"/>
+              </a:solidFill>
+              <a:latin typeface="微软雅黑" panose="020B0503020204020204" charset="-122"/>
+            </a:endParaRPr>
           </a:p>
         </p:txBody>
       </p:sp>
@@ -4614,7 +4731,7 @@
           <a:noFill/>
         </p:spPr>
         <p:txBody>
-          <a:bodyPr wrap="square" anchor="t" lIns="0" rIns="0" tIns="0" bIns="0">
+          <a:bodyPr wrap="square" lIns="0" tIns="0" rIns="0" bIns="0" anchor="t">
             <a:spAutoFit/>
           </a:bodyPr>
           <a:lstStyle/>
@@ -4635,10 +4752,16 @@
                 <a:solidFill>
                   <a:srgbClr val="8A99A2"/>
                 </a:solidFill>
-                <a:latin typeface="Microsoft YaHei"/>
+                <a:latin typeface="微软雅黑" panose="020B0503020204020204" charset="-122"/>
               </a:rPr>
               <a:t>AI Health Navigator · 团队招募</a:t>
             </a:r>
+            <a:endParaRPr sz="1000" b="0">
+              <a:solidFill>
+                <a:srgbClr val="8A99A2"/>
+              </a:solidFill>
+              <a:latin typeface="微软雅黑" panose="020B0503020204020204" charset="-122"/>
+            </a:endParaRPr>
           </a:p>
         </p:txBody>
       </p:sp>
@@ -4659,7 +4782,7 @@
           <a:noFill/>
         </p:spPr>
         <p:txBody>
-          <a:bodyPr wrap="square" anchor="t" lIns="0" rIns="0" tIns="0" bIns="0">
+          <a:bodyPr wrap="square" lIns="0" tIns="0" rIns="0" bIns="0" anchor="t">
             <a:spAutoFit/>
           </a:bodyPr>
           <a:lstStyle/>
@@ -4680,10 +4803,16 @@
                 <a:solidFill>
                   <a:srgbClr val="4A5B64"/>
                 </a:solidFill>
-                <a:latin typeface="Microsoft YaHei"/>
+                <a:latin typeface="微软雅黑" panose="020B0503020204020204" charset="-122"/>
               </a:rPr>
               <a:t>11</a:t>
             </a:r>
+            <a:endParaRPr sz="1100" b="1">
+              <a:solidFill>
+                <a:srgbClr val="4A5B64"/>
+              </a:solidFill>
+              <a:latin typeface="微软雅黑" panose="020B0503020204020204" charset="-122"/>
+            </a:endParaRPr>
           </a:p>
         </p:txBody>
       </p:sp>
@@ -4696,7 +4825,7 @@
 </file>
 
 <file path=ppt/slides/slide2.xml><?xml version="1.0" encoding="utf-8"?>
-<p:sld xmlns:a="http://schemas.openxmlformats.org/drawingml/2006/main" xmlns:p="http://schemas.openxmlformats.org/presentationml/2006/main" xmlns:r="http://schemas.openxmlformats.org/officeDocument/2006/relationships">
+<p:sld xmlns:a="http://schemas.openxmlformats.org/drawingml/2006/main" xmlns:r="http://schemas.openxmlformats.org/officeDocument/2006/relationships" xmlns:p="http://schemas.openxmlformats.org/presentationml/2006/main">
   <p:cSld>
     <p:bg>
       <p:bgPr>
@@ -4774,7 +4903,7 @@
           <a:noFill/>
         </p:spPr>
         <p:txBody>
-          <a:bodyPr wrap="square" anchor="t" lIns="0" rIns="0" tIns="0" bIns="0">
+          <a:bodyPr wrap="square" lIns="0" tIns="0" rIns="0" bIns="0" anchor="t">
             <a:spAutoFit/>
           </a:bodyPr>
           <a:lstStyle/>
@@ -4795,10 +4924,16 @@
                 <a:solidFill>
                   <a:srgbClr val="0D6B5C"/>
                 </a:solidFill>
-                <a:latin typeface="Microsoft YaHei"/>
+                <a:latin typeface="微软雅黑" panose="020B0503020204020204" charset="-122"/>
               </a:rPr>
               <a:t>01 · 一句话介绍</a:t>
             </a:r>
+            <a:endParaRPr sz="1300" b="1">
+              <a:solidFill>
+                <a:srgbClr val="0D6B5C"/>
+              </a:solidFill>
+              <a:latin typeface="微软雅黑" panose="020B0503020204020204" charset="-122"/>
+            </a:endParaRPr>
           </a:p>
         </p:txBody>
       </p:sp>
@@ -4819,7 +4954,7 @@
           <a:noFill/>
         </p:spPr>
         <p:txBody>
-          <a:bodyPr wrap="square" anchor="t" lIns="0" rIns="0" tIns="0" bIns="0">
+          <a:bodyPr wrap="square" lIns="0" tIns="0" rIns="0" bIns="0" anchor="t">
             <a:spAutoFit/>
           </a:bodyPr>
           <a:lstStyle/>
@@ -4840,10 +4975,16 @@
                 <a:solidFill>
                   <a:srgbClr val="10222B"/>
                 </a:solidFill>
-                <a:latin typeface="Microsoft YaHei"/>
+                <a:latin typeface="微软雅黑" panose="020B0503020204020204" charset="-122"/>
               </a:rPr>
               <a:t>AI Health Navigator 是什么</a:t>
             </a:r>
+            <a:endParaRPr sz="3100" b="1">
+              <a:solidFill>
+                <a:srgbClr val="10222B"/>
+              </a:solidFill>
+              <a:latin typeface="微软雅黑" panose="020B0503020204020204" charset="-122"/>
+            </a:endParaRPr>
           </a:p>
         </p:txBody>
       </p:sp>
@@ -4864,7 +5005,7 @@
           <a:noFill/>
         </p:spPr>
         <p:txBody>
-          <a:bodyPr wrap="square" anchor="t" lIns="0" rIns="0" tIns="0" bIns="0">
+          <a:bodyPr wrap="square" lIns="0" tIns="0" rIns="0" bIns="0" anchor="t">
             <a:spAutoFit/>
           </a:bodyPr>
           <a:lstStyle/>
@@ -4885,10 +5026,16 @@
                 <a:solidFill>
                   <a:srgbClr val="10222B"/>
                 </a:solidFill>
-                <a:latin typeface="Microsoft YaHei"/>
+                <a:latin typeface="微软雅黑" panose="020B0503020204020204" charset="-122"/>
               </a:rPr>
               <a:t>从身体出现异常，到真正见到医生之前，帮你管理整段健康旅程。</a:t>
             </a:r>
+            <a:endParaRPr sz="2100" b="1">
+              <a:solidFill>
+                <a:srgbClr val="10222B"/>
+              </a:solidFill>
+              <a:latin typeface="微软雅黑" panose="020B0503020204020204" charset="-122"/>
+            </a:endParaRPr>
           </a:p>
         </p:txBody>
       </p:sp>
@@ -4957,7 +5104,7 @@
           <a:noFill/>
         </p:spPr>
         <p:txBody>
-          <a:bodyPr wrap="square" anchor="t" lIns="0" rIns="0" tIns="0" bIns="0">
+          <a:bodyPr wrap="square" lIns="0" tIns="0" rIns="0" bIns="0" anchor="t">
             <a:spAutoFit/>
           </a:bodyPr>
           <a:lstStyle/>
@@ -4978,10 +5125,16 @@
                 <a:solidFill>
                   <a:srgbClr val="0D6B5C"/>
                 </a:solidFill>
-                <a:latin typeface="Microsoft YaHei"/>
+                <a:latin typeface="微软雅黑" panose="020B0503020204020204" charset="-122"/>
               </a:rPr>
               <a:t>Self-Triage</a:t>
             </a:r>
+            <a:endParaRPr sz="1300" b="1">
+              <a:solidFill>
+                <a:srgbClr val="0D6B5C"/>
+              </a:solidFill>
+              <a:latin typeface="微软雅黑" panose="020B0503020204020204" charset="-122"/>
+            </a:endParaRPr>
           </a:p>
         </p:txBody>
       </p:sp>
@@ -5002,7 +5155,7 @@
           <a:noFill/>
         </p:spPr>
         <p:txBody>
-          <a:bodyPr wrap="square" anchor="t" lIns="0" rIns="0" tIns="0" bIns="0">
+          <a:bodyPr wrap="square" lIns="0" tIns="0" rIns="0" bIns="0" anchor="t">
             <a:spAutoFit/>
           </a:bodyPr>
           <a:lstStyle/>
@@ -5023,10 +5176,16 @@
                 <a:solidFill>
                   <a:srgbClr val="10222B"/>
                 </a:solidFill>
-                <a:latin typeface="Microsoft YaHei"/>
+                <a:latin typeface="微软雅黑" panose="020B0503020204020204" charset="-122"/>
               </a:rPr>
               <a:t>自我分诊</a:t>
             </a:r>
+            <a:endParaRPr sz="1550" b="1">
+              <a:solidFill>
+                <a:srgbClr val="10222B"/>
+              </a:solidFill>
+              <a:latin typeface="微软雅黑" panose="020B0503020204020204" charset="-122"/>
+            </a:endParaRPr>
           </a:p>
         </p:txBody>
       </p:sp>
@@ -5095,7 +5254,7 @@
           <a:noFill/>
         </p:spPr>
         <p:txBody>
-          <a:bodyPr wrap="square" anchor="t" lIns="0" rIns="0" tIns="0" bIns="0">
+          <a:bodyPr wrap="square" lIns="0" tIns="0" rIns="0" bIns="0" anchor="t">
             <a:spAutoFit/>
           </a:bodyPr>
           <a:lstStyle/>
@@ -5116,10 +5275,16 @@
                 <a:solidFill>
                   <a:srgbClr val="0D6B5C"/>
                 </a:solidFill>
-                <a:latin typeface="Microsoft YaHei"/>
+                <a:latin typeface="微软雅黑" panose="020B0503020204020204" charset="-122"/>
               </a:rPr>
               <a:t>Health Episode</a:t>
             </a:r>
+            <a:endParaRPr sz="1300" b="1">
+              <a:solidFill>
+                <a:srgbClr val="0D6B5C"/>
+              </a:solidFill>
+              <a:latin typeface="微软雅黑" panose="020B0503020204020204" charset="-122"/>
+            </a:endParaRPr>
           </a:p>
         </p:txBody>
       </p:sp>
@@ -5140,7 +5305,7 @@
           <a:noFill/>
         </p:spPr>
         <p:txBody>
-          <a:bodyPr wrap="square" anchor="t" lIns="0" rIns="0" tIns="0" bIns="0">
+          <a:bodyPr wrap="square" lIns="0" tIns="0" rIns="0" bIns="0" anchor="t">
             <a:spAutoFit/>
           </a:bodyPr>
           <a:lstStyle/>
@@ -5161,10 +5326,16 @@
                 <a:solidFill>
                   <a:srgbClr val="10222B"/>
                 </a:solidFill>
-                <a:latin typeface="Microsoft YaHei"/>
+                <a:latin typeface="微软雅黑" panose="020B0503020204020204" charset="-122"/>
               </a:rPr>
               <a:t>健康事件</a:t>
             </a:r>
+            <a:endParaRPr sz="1550" b="1">
+              <a:solidFill>
+                <a:srgbClr val="10222B"/>
+              </a:solidFill>
+              <a:latin typeface="微软雅黑" panose="020B0503020204020204" charset="-122"/>
+            </a:endParaRPr>
           </a:p>
         </p:txBody>
       </p:sp>
@@ -5233,7 +5404,7 @@
           <a:noFill/>
         </p:spPr>
         <p:txBody>
-          <a:bodyPr wrap="square" anchor="t" lIns="0" rIns="0" tIns="0" bIns="0">
+          <a:bodyPr wrap="square" lIns="0" tIns="0" rIns="0" bIns="0" anchor="t">
             <a:spAutoFit/>
           </a:bodyPr>
           <a:lstStyle/>
@@ -5254,10 +5425,16 @@
                 <a:solidFill>
                   <a:srgbClr val="0D6B5C"/>
                 </a:solidFill>
-                <a:latin typeface="Microsoft YaHei"/>
+                <a:latin typeface="微软雅黑" panose="020B0503020204020204" charset="-122"/>
               </a:rPr>
               <a:t>Continuous Follow-up</a:t>
             </a:r>
+            <a:endParaRPr sz="1300" b="1">
+              <a:solidFill>
+                <a:srgbClr val="0D6B5C"/>
+              </a:solidFill>
+              <a:latin typeface="微软雅黑" panose="020B0503020204020204" charset="-122"/>
+            </a:endParaRPr>
           </a:p>
         </p:txBody>
       </p:sp>
@@ -5278,7 +5455,7 @@
           <a:noFill/>
         </p:spPr>
         <p:txBody>
-          <a:bodyPr wrap="square" anchor="t" lIns="0" rIns="0" tIns="0" bIns="0">
+          <a:bodyPr wrap="square" lIns="0" tIns="0" rIns="0" bIns="0" anchor="t">
             <a:spAutoFit/>
           </a:bodyPr>
           <a:lstStyle/>
@@ -5299,10 +5476,16 @@
                 <a:solidFill>
                   <a:srgbClr val="10222B"/>
                 </a:solidFill>
-                <a:latin typeface="Microsoft YaHei"/>
+                <a:latin typeface="微软雅黑" panose="020B0503020204020204" charset="-122"/>
               </a:rPr>
               <a:t>持续追踪</a:t>
             </a:r>
+            <a:endParaRPr sz="1550" b="1">
+              <a:solidFill>
+                <a:srgbClr val="10222B"/>
+              </a:solidFill>
+              <a:latin typeface="微软雅黑" panose="020B0503020204020204" charset="-122"/>
+            </a:endParaRPr>
           </a:p>
         </p:txBody>
       </p:sp>
@@ -5371,7 +5554,7 @@
           <a:noFill/>
         </p:spPr>
         <p:txBody>
-          <a:bodyPr wrap="square" anchor="t" lIns="0" rIns="0" tIns="0" bIns="0">
+          <a:bodyPr wrap="square" lIns="0" tIns="0" rIns="0" bIns="0" anchor="t">
             <a:spAutoFit/>
           </a:bodyPr>
           <a:lstStyle/>
@@ -5392,10 +5575,16 @@
                 <a:solidFill>
                   <a:srgbClr val="0D6B5C"/>
                 </a:solidFill>
-                <a:latin typeface="Microsoft YaHei"/>
+                <a:latin typeface="微软雅黑" panose="020B0503020204020204" charset="-122"/>
               </a:rPr>
               <a:t>Doctor Handoff</a:t>
             </a:r>
+            <a:endParaRPr sz="1300" b="1">
+              <a:solidFill>
+                <a:srgbClr val="0D6B5C"/>
+              </a:solidFill>
+              <a:latin typeface="微软雅黑" panose="020B0503020204020204" charset="-122"/>
+            </a:endParaRPr>
           </a:p>
         </p:txBody>
       </p:sp>
@@ -5416,7 +5605,7 @@
           <a:noFill/>
         </p:spPr>
         <p:txBody>
-          <a:bodyPr wrap="square" anchor="t" lIns="0" rIns="0" tIns="0" bIns="0">
+          <a:bodyPr wrap="square" lIns="0" tIns="0" rIns="0" bIns="0" anchor="t">
             <a:spAutoFit/>
           </a:bodyPr>
           <a:lstStyle/>
@@ -5437,10 +5626,16 @@
                 <a:solidFill>
                   <a:srgbClr val="10222B"/>
                 </a:solidFill>
-                <a:latin typeface="Microsoft YaHei"/>
+                <a:latin typeface="微软雅黑" panose="020B0503020204020204" charset="-122"/>
               </a:rPr>
               <a:t>就医摘要</a:t>
             </a:r>
+            <a:endParaRPr sz="1550" b="1">
+              <a:solidFill>
+                <a:srgbClr val="10222B"/>
+              </a:solidFill>
+              <a:latin typeface="微软雅黑" panose="020B0503020204020204" charset="-122"/>
+            </a:endParaRPr>
           </a:p>
         </p:txBody>
       </p:sp>
@@ -5507,7 +5702,7 @@
           <a:noFill/>
         </p:spPr>
         <p:txBody>
-          <a:bodyPr wrap="square" anchor="ctr" lIns="0" rIns="0" tIns="0" bIns="0">
+          <a:bodyPr wrap="square" lIns="0" tIns="0" rIns="0" bIns="0" anchor="ctr">
             <a:spAutoFit/>
           </a:bodyPr>
           <a:lstStyle/>
@@ -5528,7 +5723,7 @@
                 <a:solidFill>
                   <a:srgbClr val="0D6B5C"/>
                 </a:solidFill>
-                <a:latin typeface="Microsoft YaHei"/>
+                <a:latin typeface="微软雅黑" panose="020B0503020204020204" charset="-122"/>
               </a:rPr>
               <a:t>已有可交互 Web Demo（虚构数据 · 不替代医疗建议）</a:t>
             </a:r>
@@ -5537,10 +5732,16 @@
                 <a:solidFill>
                   <a:srgbClr val="4A5B64"/>
                 </a:solidFill>
-                <a:latin typeface="Microsoft YaHei"/>
+                <a:latin typeface="微软雅黑" panose="020B0503020204020204" charset="-122"/>
               </a:rPr>
               <a:t>   首页 / 结构化问询 / Episode 时间线 / 症状趋势 / 就医摘要</a:t>
             </a:r>
+            <a:endParaRPr sz="1300" b="0">
+              <a:solidFill>
+                <a:srgbClr val="4A5B64"/>
+              </a:solidFill>
+              <a:latin typeface="微软雅黑" panose="020B0503020204020204" charset="-122"/>
+            </a:endParaRPr>
           </a:p>
         </p:txBody>
       </p:sp>
@@ -5561,7 +5762,7 @@
           <a:noFill/>
         </p:spPr>
         <p:txBody>
-          <a:bodyPr wrap="square" anchor="t" lIns="0" rIns="0" tIns="0" bIns="0">
+          <a:bodyPr wrap="square" lIns="0" tIns="0" rIns="0" bIns="0" anchor="t">
             <a:spAutoFit/>
           </a:bodyPr>
           <a:lstStyle/>
@@ -5582,10 +5783,16 @@
                 <a:solidFill>
                   <a:srgbClr val="8A99A2"/>
                 </a:solidFill>
-                <a:latin typeface="Microsoft YaHei"/>
+                <a:latin typeface="微软雅黑" panose="020B0503020204020204" charset="-122"/>
               </a:rPr>
               <a:t>AI Health Navigator · 团队招募</a:t>
             </a:r>
+            <a:endParaRPr sz="1000" b="0">
+              <a:solidFill>
+                <a:srgbClr val="8A99A2"/>
+              </a:solidFill>
+              <a:latin typeface="微软雅黑" panose="020B0503020204020204" charset="-122"/>
+            </a:endParaRPr>
           </a:p>
         </p:txBody>
       </p:sp>
@@ -5606,7 +5813,7 @@
           <a:noFill/>
         </p:spPr>
         <p:txBody>
-          <a:bodyPr wrap="square" anchor="t" lIns="0" rIns="0" tIns="0" bIns="0">
+          <a:bodyPr wrap="square" lIns="0" tIns="0" rIns="0" bIns="0" anchor="t">
             <a:spAutoFit/>
           </a:bodyPr>
           <a:lstStyle/>
@@ -5627,10 +5834,16 @@
                 <a:solidFill>
                   <a:srgbClr val="4A5B64"/>
                 </a:solidFill>
-                <a:latin typeface="Microsoft YaHei"/>
+                <a:latin typeface="微软雅黑" panose="020B0503020204020204" charset="-122"/>
               </a:rPr>
               <a:t>2</a:t>
             </a:r>
+            <a:endParaRPr sz="1100" b="1">
+              <a:solidFill>
+                <a:srgbClr val="4A5B64"/>
+              </a:solidFill>
+              <a:latin typeface="微软雅黑" panose="020B0503020204020204" charset="-122"/>
+            </a:endParaRPr>
           </a:p>
         </p:txBody>
       </p:sp>
@@ -5643,7 +5856,7 @@
 </file>
 
 <file path=ppt/slides/slide3.xml><?xml version="1.0" encoding="utf-8"?>
-<p:sld xmlns:a="http://schemas.openxmlformats.org/drawingml/2006/main" xmlns:p="http://schemas.openxmlformats.org/presentationml/2006/main" xmlns:r="http://schemas.openxmlformats.org/officeDocument/2006/relationships">
+<p:sld xmlns:a="http://schemas.openxmlformats.org/drawingml/2006/main" xmlns:r="http://schemas.openxmlformats.org/officeDocument/2006/relationships" xmlns:p="http://schemas.openxmlformats.org/presentationml/2006/main">
   <p:cSld>
     <p:bg>
       <p:bgPr>
@@ -5721,7 +5934,7 @@
           <a:noFill/>
         </p:spPr>
         <p:txBody>
-          <a:bodyPr wrap="square" anchor="t" lIns="0" rIns="0" tIns="0" bIns="0">
+          <a:bodyPr wrap="square" lIns="0" tIns="0" rIns="0" bIns="0" anchor="t">
             <a:spAutoFit/>
           </a:bodyPr>
           <a:lstStyle/>
@@ -5742,10 +5955,16 @@
                 <a:solidFill>
                   <a:srgbClr val="0D6B5C"/>
                 </a:solidFill>
-                <a:latin typeface="Microsoft YaHei"/>
+                <a:latin typeface="微软雅黑" panose="020B0503020204020204" charset="-122"/>
               </a:rPr>
               <a:t>02 · 问题</a:t>
             </a:r>
+            <a:endParaRPr sz="1300" b="1">
+              <a:solidFill>
+                <a:srgbClr val="0D6B5C"/>
+              </a:solidFill>
+              <a:latin typeface="微软雅黑" panose="020B0503020204020204" charset="-122"/>
+            </a:endParaRPr>
           </a:p>
         </p:txBody>
       </p:sp>
@@ -5766,7 +5985,7 @@
           <a:noFill/>
         </p:spPr>
         <p:txBody>
-          <a:bodyPr wrap="square" anchor="t" lIns="0" rIns="0" tIns="0" bIns="0">
+          <a:bodyPr wrap="square" lIns="0" tIns="0" rIns="0" bIns="0" anchor="t">
             <a:spAutoFit/>
           </a:bodyPr>
           <a:lstStyle/>
@@ -5787,10 +6006,16 @@
                 <a:solidFill>
                   <a:srgbClr val="10222B"/>
                 </a:solidFill>
-                <a:latin typeface="Microsoft YaHei"/>
+                <a:latin typeface="微软雅黑" panose="020B0503020204020204" charset="-122"/>
               </a:rPr>
               <a:t>今天的不舒服，卡在哪一步</a:t>
             </a:r>
+            <a:endParaRPr sz="3100" b="1">
+              <a:solidFill>
+                <a:srgbClr val="10222B"/>
+              </a:solidFill>
+              <a:latin typeface="微软雅黑" panose="020B0503020204020204" charset="-122"/>
+            </a:endParaRPr>
           </a:p>
         </p:txBody>
       </p:sp>
@@ -5811,7 +6036,7 @@
           <a:noFill/>
         </p:spPr>
         <p:txBody>
-          <a:bodyPr wrap="square" anchor="t" lIns="0" rIns="0" tIns="0" bIns="0">
+          <a:bodyPr wrap="square" lIns="0" tIns="0" rIns="0" bIns="0" anchor="t">
             <a:spAutoFit/>
           </a:bodyPr>
           <a:lstStyle/>
@@ -5832,10 +6057,16 @@
                 <a:solidFill>
                   <a:srgbClr val="10222B"/>
                 </a:solidFill>
-                <a:latin typeface="Microsoft YaHei"/>
+                <a:latin typeface="微软雅黑" panose="020B0503020204020204" charset="-122"/>
               </a:rPr>
               <a:t>用户真正困惑的，往往不是「这是什么病」，而是：</a:t>
             </a:r>
+            <a:endParaRPr sz="1700" b="1">
+              <a:solidFill>
+                <a:srgbClr val="10222B"/>
+              </a:solidFill>
+              <a:latin typeface="微软雅黑" panose="020B0503020204020204" charset="-122"/>
+            </a:endParaRPr>
           </a:p>
         </p:txBody>
       </p:sp>
@@ -5900,7 +6131,7 @@
           <a:noFill/>
         </p:spPr>
         <p:txBody>
-          <a:bodyPr wrap="square" anchor="ctr" lIns="0" rIns="0" tIns="0" bIns="0">
+          <a:bodyPr wrap="square" lIns="0" tIns="0" rIns="0" bIns="0" anchor="ctr">
             <a:spAutoFit/>
           </a:bodyPr>
           <a:lstStyle/>
@@ -5921,10 +6152,16 @@
                 <a:solidFill>
                   <a:srgbClr val="0D6B5C"/>
                 </a:solidFill>
-                <a:latin typeface="Microsoft YaHei"/>
+                <a:latin typeface="微软雅黑" panose="020B0503020204020204" charset="-122"/>
               </a:rPr>
               <a:t>我现在该怎么办？</a:t>
             </a:r>
+            <a:endParaRPr sz="2000" b="1">
+              <a:solidFill>
+                <a:srgbClr val="0D6B5C"/>
+              </a:solidFill>
+              <a:latin typeface="微软雅黑" panose="020B0503020204020204" charset="-122"/>
+            </a:endParaRPr>
           </a:p>
         </p:txBody>
       </p:sp>
@@ -5989,7 +6226,7 @@
           <a:noFill/>
         </p:spPr>
         <p:txBody>
-          <a:bodyPr wrap="square" anchor="ctr" lIns="0" rIns="0" tIns="0" bIns="0">
+          <a:bodyPr wrap="square" lIns="0" tIns="0" rIns="0" bIns="0" anchor="ctr">
             <a:spAutoFit/>
           </a:bodyPr>
           <a:lstStyle/>
@@ -6010,10 +6247,16 @@
                 <a:solidFill>
                   <a:srgbClr val="0D6B5C"/>
                 </a:solidFill>
-                <a:latin typeface="Microsoft YaHei"/>
+                <a:latin typeface="微软雅黑" panose="020B0503020204020204" charset="-122"/>
               </a:rPr>
               <a:t>需要去医院吗？</a:t>
             </a:r>
+            <a:endParaRPr sz="2000" b="1">
+              <a:solidFill>
+                <a:srgbClr val="0D6B5C"/>
+              </a:solidFill>
+              <a:latin typeface="微软雅黑" panose="020B0503020204020204" charset="-122"/>
+            </a:endParaRPr>
           </a:p>
         </p:txBody>
       </p:sp>
@@ -6078,7 +6321,7 @@
           <a:noFill/>
         </p:spPr>
         <p:txBody>
-          <a:bodyPr wrap="square" anchor="ctr" lIns="0" rIns="0" tIns="0" bIns="0">
+          <a:bodyPr wrap="square" lIns="0" tIns="0" rIns="0" bIns="0" anchor="ctr">
             <a:spAutoFit/>
           </a:bodyPr>
           <a:lstStyle/>
@@ -6099,10 +6342,16 @@
                 <a:solidFill>
                   <a:srgbClr val="0D6B5C"/>
                 </a:solidFill>
-                <a:latin typeface="Microsoft YaHei"/>
+                <a:latin typeface="微软雅黑" panose="020B0503020204020204" charset="-122"/>
               </a:rPr>
               <a:t>什么时候不能再等？</a:t>
             </a:r>
+            <a:endParaRPr sz="2000" b="1">
+              <a:solidFill>
+                <a:srgbClr val="0D6B5C"/>
+              </a:solidFill>
+              <a:latin typeface="微软雅黑" panose="020B0503020204020204" charset="-122"/>
+            </a:endParaRPr>
           </a:p>
         </p:txBody>
       </p:sp>
@@ -6171,7 +6420,7 @@
           <a:noFill/>
         </p:spPr>
         <p:txBody>
-          <a:bodyPr wrap="square" anchor="t" lIns="0" rIns="0" tIns="0" bIns="0">
+          <a:bodyPr wrap="square" lIns="0" tIns="0" rIns="0" bIns="0" anchor="t">
             <a:spAutoFit/>
           </a:bodyPr>
           <a:lstStyle/>
@@ -6192,10 +6441,16 @@
                 <a:solidFill>
                   <a:srgbClr val="10222B"/>
                 </a:solidFill>
-                <a:latin typeface="Microsoft YaHei"/>
+                <a:latin typeface="微软雅黑" panose="020B0503020204020204" charset="-122"/>
               </a:rPr>
               <a:t>现有的「搜索循环」</a:t>
             </a:r>
+            <a:endParaRPr sz="1600" b="1">
+              <a:solidFill>
+                <a:srgbClr val="10222B"/>
+              </a:solidFill>
+              <a:latin typeface="微软雅黑" panose="020B0503020204020204" charset="-122"/>
+            </a:endParaRPr>
           </a:p>
         </p:txBody>
       </p:sp>
@@ -6216,7 +6471,7 @@
           <a:noFill/>
         </p:spPr>
         <p:txBody>
-          <a:bodyPr wrap="square" anchor="t" lIns="0" rIns="0" tIns="0" bIns="0">
+          <a:bodyPr wrap="square" lIns="0" tIns="0" rIns="0" bIns="0" anchor="t">
             <a:spAutoFit/>
           </a:bodyPr>
           <a:lstStyle/>
@@ -6237,10 +6492,16 @@
                 <a:solidFill>
                   <a:srgbClr val="4A5B64"/>
                 </a:solidFill>
-                <a:latin typeface="Microsoft YaHei"/>
+                <a:latin typeface="微软雅黑" panose="020B0503020204020204" charset="-122"/>
               </a:rPr>
               <a:t>反复搜索 / 问 AI</a:t>
             </a:r>
+            <a:endParaRPr sz="1450" b="1">
+              <a:solidFill>
+                <a:srgbClr val="4A5B64"/>
+              </a:solidFill>
+              <a:latin typeface="微软雅黑" panose="020B0503020204020204" charset="-122"/>
+            </a:endParaRPr>
           </a:p>
         </p:txBody>
       </p:sp>
@@ -6261,7 +6522,7 @@
           <a:noFill/>
         </p:spPr>
         <p:txBody>
-          <a:bodyPr wrap="square" anchor="t" lIns="0" rIns="0" tIns="0" bIns="0">
+          <a:bodyPr wrap="square" lIns="0" tIns="0" rIns="0" bIns="0" anchor="t">
             <a:spAutoFit/>
           </a:bodyPr>
           <a:lstStyle/>
@@ -6282,10 +6543,16 @@
                 <a:solidFill>
                   <a:srgbClr val="8A99A2"/>
                 </a:solidFill>
-                <a:latin typeface="Microsoft YaHei"/>
+                <a:latin typeface="微软雅黑" panose="020B0503020204020204" charset="-122"/>
               </a:rPr>
               <a:t>↓</a:t>
             </a:r>
+            <a:endParaRPr sz="1500" b="1">
+              <a:solidFill>
+                <a:srgbClr val="8A99A2"/>
+              </a:solidFill>
+              <a:latin typeface="微软雅黑" panose="020B0503020204020204" charset="-122"/>
+            </a:endParaRPr>
           </a:p>
         </p:txBody>
       </p:sp>
@@ -6306,7 +6573,7 @@
           <a:noFill/>
         </p:spPr>
         <p:txBody>
-          <a:bodyPr wrap="square" anchor="t" lIns="0" rIns="0" tIns="0" bIns="0">
+          <a:bodyPr wrap="square" lIns="0" tIns="0" rIns="0" bIns="0" anchor="t">
             <a:spAutoFit/>
           </a:bodyPr>
           <a:lstStyle/>
@@ -6327,10 +6594,16 @@
                 <a:solidFill>
                   <a:srgbClr val="4A5B64"/>
                 </a:solidFill>
-                <a:latin typeface="Microsoft YaHei"/>
+                <a:latin typeface="微软雅黑" panose="020B0503020204020204" charset="-122"/>
               </a:rPr>
               <a:t>得到碎片化答案</a:t>
             </a:r>
+            <a:endParaRPr sz="1450" b="1">
+              <a:solidFill>
+                <a:srgbClr val="4A5B64"/>
+              </a:solidFill>
+              <a:latin typeface="微软雅黑" panose="020B0503020204020204" charset="-122"/>
+            </a:endParaRPr>
           </a:p>
         </p:txBody>
       </p:sp>
@@ -6351,7 +6624,7 @@
           <a:noFill/>
         </p:spPr>
         <p:txBody>
-          <a:bodyPr wrap="square" anchor="t" lIns="0" rIns="0" tIns="0" bIns="0">
+          <a:bodyPr wrap="square" lIns="0" tIns="0" rIns="0" bIns="0" anchor="t">
             <a:spAutoFit/>
           </a:bodyPr>
           <a:lstStyle/>
@@ -6372,10 +6645,16 @@
                 <a:solidFill>
                   <a:srgbClr val="8A99A2"/>
                 </a:solidFill>
-                <a:latin typeface="Microsoft YaHei"/>
+                <a:latin typeface="微软雅黑" panose="020B0503020204020204" charset="-122"/>
               </a:rPr>
               <a:t>↓</a:t>
             </a:r>
+            <a:endParaRPr sz="1500" b="1">
+              <a:solidFill>
+                <a:srgbClr val="8A99A2"/>
+              </a:solidFill>
+              <a:latin typeface="微软雅黑" panose="020B0503020204020204" charset="-122"/>
+            </a:endParaRPr>
           </a:p>
         </p:txBody>
       </p:sp>
@@ -6396,7 +6675,7 @@
           <a:noFill/>
         </p:spPr>
         <p:txBody>
-          <a:bodyPr wrap="square" anchor="t" lIns="0" rIns="0" tIns="0" bIns="0">
+          <a:bodyPr wrap="square" lIns="0" tIns="0" rIns="0" bIns="0" anchor="t">
             <a:spAutoFit/>
           </a:bodyPr>
           <a:lstStyle/>
@@ -6417,10 +6696,16 @@
                 <a:solidFill>
                   <a:srgbClr val="4A5B64"/>
                 </a:solidFill>
-                <a:latin typeface="Microsoft YaHei"/>
+                <a:latin typeface="微软雅黑" panose="020B0503020204020204" charset="-122"/>
               </a:rPr>
               <a:t>越来越不确定、更焦虑</a:t>
             </a:r>
+            <a:endParaRPr sz="1450" b="1">
+              <a:solidFill>
+                <a:srgbClr val="4A5B64"/>
+              </a:solidFill>
+              <a:latin typeface="微软雅黑" panose="020B0503020204020204" charset="-122"/>
+            </a:endParaRPr>
           </a:p>
         </p:txBody>
       </p:sp>
@@ -6441,7 +6726,7 @@
           <a:noFill/>
         </p:spPr>
         <p:txBody>
-          <a:bodyPr wrap="square" anchor="t" lIns="0" rIns="0" tIns="0" bIns="0">
+          <a:bodyPr wrap="square" lIns="0" tIns="0" rIns="0" bIns="0" anchor="t">
             <a:spAutoFit/>
           </a:bodyPr>
           <a:lstStyle/>
@@ -6462,10 +6747,16 @@
                 <a:solidFill>
                   <a:srgbClr val="8A99A2"/>
                 </a:solidFill>
-                <a:latin typeface="Microsoft YaHei"/>
+                <a:latin typeface="微软雅黑" panose="020B0503020204020204" charset="-122"/>
               </a:rPr>
               <a:t>↓</a:t>
             </a:r>
+            <a:endParaRPr sz="1500" b="1">
+              <a:solidFill>
+                <a:srgbClr val="8A99A2"/>
+              </a:solidFill>
+              <a:latin typeface="微软雅黑" panose="020B0503020204020204" charset="-122"/>
+            </a:endParaRPr>
           </a:p>
         </p:txBody>
       </p:sp>
@@ -6486,7 +6777,7 @@
           <a:noFill/>
         </p:spPr>
         <p:txBody>
-          <a:bodyPr wrap="square" anchor="t" lIns="0" rIns="0" tIns="0" bIns="0">
+          <a:bodyPr wrap="square" lIns="0" tIns="0" rIns="0" bIns="0" anchor="t">
             <a:spAutoFit/>
           </a:bodyPr>
           <a:lstStyle/>
@@ -6507,10 +6798,16 @@
                 <a:solidFill>
                   <a:srgbClr val="4A5B64"/>
                 </a:solidFill>
-                <a:latin typeface="Microsoft YaHei"/>
+                <a:latin typeface="微软雅黑" panose="020B0503020204020204" charset="-122"/>
               </a:rPr>
               <a:t>继续搜索</a:t>
             </a:r>
+            <a:endParaRPr sz="1450" b="1">
+              <a:solidFill>
+                <a:srgbClr val="4A5B64"/>
+              </a:solidFill>
+              <a:latin typeface="微软雅黑" panose="020B0503020204020204" charset="-122"/>
+            </a:endParaRPr>
           </a:p>
         </p:txBody>
       </p:sp>
@@ -6522,7 +6819,7 @@
         </p:nvSpPr>
         <p:spPr>
           <a:xfrm>
-            <a:off x="6629400" y="5669279"/>
+            <a:off x="6397625" y="5431789"/>
             <a:ext cx="4206240" cy="320040"/>
           </a:xfrm>
           <a:prstGeom prst="rect">
@@ -6531,7 +6828,7 @@
           <a:noFill/>
         </p:spPr>
         <p:txBody>
-          <a:bodyPr wrap="square" anchor="t" lIns="0" rIns="0" tIns="0" bIns="0">
+          <a:bodyPr wrap="square" lIns="0" tIns="0" rIns="0" bIns="0" anchor="t">
             <a:spAutoFit/>
           </a:bodyPr>
           <a:lstStyle/>
@@ -6552,10 +6849,16 @@
                 <a:solidFill>
                   <a:srgbClr val="0D6B5C"/>
                 </a:solidFill>
-                <a:latin typeface="Microsoft YaHei"/>
+                <a:latin typeface="微软雅黑" panose="020B0503020204020204" charset="-122"/>
               </a:rPr>
               <a:t>↻ 又回到原点</a:t>
             </a:r>
+            <a:endParaRPr sz="1300" b="1">
+              <a:solidFill>
+                <a:srgbClr val="0D6B5C"/>
+              </a:solidFill>
+              <a:latin typeface="微软雅黑" panose="020B0503020204020204" charset="-122"/>
+            </a:endParaRPr>
           </a:p>
         </p:txBody>
       </p:sp>
@@ -6576,7 +6879,7 @@
           <a:noFill/>
         </p:spPr>
         <p:txBody>
-          <a:bodyPr wrap="square" anchor="t" lIns="0" rIns="0" tIns="0" bIns="0">
+          <a:bodyPr wrap="square" lIns="0" tIns="0" rIns="0" bIns="0" anchor="t">
             <a:spAutoFit/>
           </a:bodyPr>
           <a:lstStyle/>
@@ -6597,10 +6900,16 @@
                 <a:solidFill>
                   <a:srgbClr val="8A99A2"/>
                 </a:solidFill>
-                <a:latin typeface="Microsoft YaHei"/>
+                <a:latin typeface="微软雅黑" panose="020B0503020204020204" charset="-122"/>
               </a:rPr>
               <a:t>AI Health Navigator · 团队招募</a:t>
             </a:r>
+            <a:endParaRPr sz="1000" b="0">
+              <a:solidFill>
+                <a:srgbClr val="8A99A2"/>
+              </a:solidFill>
+              <a:latin typeface="微软雅黑" panose="020B0503020204020204" charset="-122"/>
+            </a:endParaRPr>
           </a:p>
         </p:txBody>
       </p:sp>
@@ -6621,7 +6930,7 @@
           <a:noFill/>
         </p:spPr>
         <p:txBody>
-          <a:bodyPr wrap="square" anchor="t" lIns="0" rIns="0" tIns="0" bIns="0">
+          <a:bodyPr wrap="square" lIns="0" tIns="0" rIns="0" bIns="0" anchor="t">
             <a:spAutoFit/>
           </a:bodyPr>
           <a:lstStyle/>
@@ -6642,10 +6951,16 @@
                 <a:solidFill>
                   <a:srgbClr val="4A5B64"/>
                 </a:solidFill>
-                <a:latin typeface="Microsoft YaHei"/>
+                <a:latin typeface="微软雅黑" panose="020B0503020204020204" charset="-122"/>
               </a:rPr>
               <a:t>3</a:t>
             </a:r>
+            <a:endParaRPr sz="1100" b="1">
+              <a:solidFill>
+                <a:srgbClr val="4A5B64"/>
+              </a:solidFill>
+              <a:latin typeface="微软雅黑" panose="020B0503020204020204" charset="-122"/>
+            </a:endParaRPr>
           </a:p>
         </p:txBody>
       </p:sp>
@@ -6658,7 +6973,7 @@
 </file>
 
 <file path=ppt/slides/slide4.xml><?xml version="1.0" encoding="utf-8"?>
-<p:sld xmlns:a="http://schemas.openxmlformats.org/drawingml/2006/main" xmlns:p="http://schemas.openxmlformats.org/presentationml/2006/main" xmlns:r="http://schemas.openxmlformats.org/officeDocument/2006/relationships">
+<p:sld xmlns:a="http://schemas.openxmlformats.org/drawingml/2006/main" xmlns:r="http://schemas.openxmlformats.org/officeDocument/2006/relationships" xmlns:p="http://schemas.openxmlformats.org/presentationml/2006/main">
   <p:cSld>
     <p:bg>
       <p:bgPr>
@@ -6736,7 +7051,7 @@
           <a:noFill/>
         </p:spPr>
         <p:txBody>
-          <a:bodyPr wrap="square" anchor="t" lIns="0" rIns="0" tIns="0" bIns="0">
+          <a:bodyPr wrap="square" lIns="0" tIns="0" rIns="0" bIns="0" anchor="t">
             <a:spAutoFit/>
           </a:bodyPr>
           <a:lstStyle/>
@@ -6757,10 +7072,16 @@
                 <a:solidFill>
                   <a:srgbClr val="0D6B5C"/>
                 </a:solidFill>
-                <a:latin typeface="Microsoft YaHei"/>
+                <a:latin typeface="微软雅黑" panose="020B0503020204020204" charset="-122"/>
               </a:rPr>
               <a:t>03 · Solution</a:t>
             </a:r>
+            <a:endParaRPr sz="1300" b="1">
+              <a:solidFill>
+                <a:srgbClr val="0D6B5C"/>
+              </a:solidFill>
+              <a:latin typeface="微软雅黑" panose="020B0503020204020204" charset="-122"/>
+            </a:endParaRPr>
           </a:p>
         </p:txBody>
       </p:sp>
@@ -6781,7 +7102,7 @@
           <a:noFill/>
         </p:spPr>
         <p:txBody>
-          <a:bodyPr wrap="square" anchor="t" lIns="0" rIns="0" tIns="0" bIns="0">
+          <a:bodyPr wrap="square" lIns="0" tIns="0" rIns="0" bIns="0" anchor="t">
             <a:spAutoFit/>
           </a:bodyPr>
           <a:lstStyle/>
@@ -6802,10 +7123,16 @@
                 <a:solidFill>
                   <a:srgbClr val="10222B"/>
                 </a:solidFill>
-                <a:latin typeface="Microsoft YaHei"/>
+                <a:latin typeface="微软雅黑" panose="020B0503020204020204" charset="-122"/>
               </a:rPr>
               <a:t>一次 Health Episode 管到底</a:t>
             </a:r>
+            <a:endParaRPr sz="3100" b="1">
+              <a:solidFill>
+                <a:srgbClr val="10222B"/>
+              </a:solidFill>
+              <a:latin typeface="微软雅黑" panose="020B0503020204020204" charset="-122"/>
+            </a:endParaRPr>
           </a:p>
         </p:txBody>
       </p:sp>
@@ -6826,7 +7153,7 @@
           <a:noFill/>
         </p:spPr>
         <p:txBody>
-          <a:bodyPr wrap="square" anchor="t" lIns="0" rIns="0" tIns="0" bIns="0">
+          <a:bodyPr wrap="square" lIns="0" tIns="0" rIns="0" bIns="0" anchor="t">
             <a:spAutoFit/>
           </a:bodyPr>
           <a:lstStyle/>
@@ -6847,10 +7174,16 @@
                 <a:solidFill>
                   <a:srgbClr val="10222B"/>
                 </a:solidFill>
-                <a:latin typeface="Microsoft YaHei"/>
+                <a:latin typeface="微软雅黑" panose="020B0503020204020204" charset="-122"/>
               </a:rPr>
               <a:t>不是搜索引擎式的症状罗列，而是一条有始有终的线索。</a:t>
             </a:r>
+            <a:endParaRPr sz="1700" b="1">
+              <a:solidFill>
+                <a:srgbClr val="10222B"/>
+              </a:solidFill>
+              <a:latin typeface="微软雅黑" panose="020B0503020204020204" charset="-122"/>
+            </a:endParaRPr>
           </a:p>
         </p:txBody>
       </p:sp>
@@ -6893,7 +7226,7 @@
           </a:fontRef>
         </p:style>
         <p:txBody>
-          <a:bodyPr rtlCol="0" anchor="ctr" wrap="square" lIns="54864" rIns="54864" tIns="27432" bIns="27432"/>
+          <a:bodyPr wrap="square" lIns="54864" tIns="27432" rIns="54864" bIns="27432" rtlCol="0" anchor="ctr"/>
           <a:lstStyle/>
           <a:p>
             <a:pPr algn="ctr">
@@ -6906,10 +7239,16 @@
                 <a:solidFill>
                   <a:srgbClr val="0D6B5C"/>
                 </a:solidFill>
-                <a:latin typeface="Microsoft YaHei"/>
+                <a:latin typeface="微软雅黑" panose="020B0503020204020204" charset="-122"/>
               </a:rPr>
               <a:t>描述不适</a:t>
             </a:r>
+            <a:endParaRPr sz="1350" b="1">
+              <a:solidFill>
+                <a:srgbClr val="0D6B5C"/>
+              </a:solidFill>
+              <a:latin typeface="微软雅黑" panose="020B0503020204020204" charset="-122"/>
+            </a:endParaRPr>
           </a:p>
         </p:txBody>
       </p:sp>
@@ -6930,7 +7269,7 @@
           <a:noFill/>
         </p:spPr>
         <p:txBody>
-          <a:bodyPr wrap="square" anchor="ctr" lIns="0" rIns="0" tIns="0" bIns="0">
+          <a:bodyPr wrap="square" lIns="0" tIns="0" rIns="0" bIns="0" anchor="ctr">
             <a:spAutoFit/>
           </a:bodyPr>
           <a:lstStyle/>
@@ -6951,10 +7290,16 @@
                 <a:solidFill>
                   <a:srgbClr val="4A5B64"/>
                 </a:solidFill>
-                <a:latin typeface="Microsoft YaHei"/>
+                <a:latin typeface="微软雅黑" panose="020B0503020204020204" charset="-122"/>
               </a:rPr>
               <a:t>→</a:t>
             </a:r>
+            <a:endParaRPr sz="1700" b="1">
+              <a:solidFill>
+                <a:srgbClr val="4A5B64"/>
+              </a:solidFill>
+              <a:latin typeface="微软雅黑" panose="020B0503020204020204" charset="-122"/>
+            </a:endParaRPr>
           </a:p>
         </p:txBody>
       </p:sp>
@@ -6997,7 +7342,7 @@
           </a:fontRef>
         </p:style>
         <p:txBody>
-          <a:bodyPr rtlCol="0" anchor="ctr" wrap="square" lIns="54864" rIns="54864" tIns="27432" bIns="27432"/>
+          <a:bodyPr wrap="square" lIns="54864" tIns="27432" rIns="54864" bIns="27432" rtlCol="0" anchor="ctr"/>
           <a:lstStyle/>
           <a:p>
             <a:pPr algn="ctr">
@@ -7010,10 +7355,16 @@
                 <a:solidFill>
                   <a:srgbClr val="0D6B5C"/>
                 </a:solidFill>
-                <a:latin typeface="Microsoft YaHei"/>
+                <a:latin typeface="微软雅黑" panose="020B0503020204020204" charset="-122"/>
               </a:rPr>
               <a:t>结构化分诊</a:t>
             </a:r>
+            <a:endParaRPr sz="1350" b="1">
+              <a:solidFill>
+                <a:srgbClr val="0D6B5C"/>
+              </a:solidFill>
+              <a:latin typeface="微软雅黑" panose="020B0503020204020204" charset="-122"/>
+            </a:endParaRPr>
           </a:p>
         </p:txBody>
       </p:sp>
@@ -7034,7 +7385,7 @@
           <a:noFill/>
         </p:spPr>
         <p:txBody>
-          <a:bodyPr wrap="square" anchor="ctr" lIns="0" rIns="0" tIns="0" bIns="0">
+          <a:bodyPr wrap="square" lIns="0" tIns="0" rIns="0" bIns="0" anchor="ctr">
             <a:spAutoFit/>
           </a:bodyPr>
           <a:lstStyle/>
@@ -7055,10 +7406,16 @@
                 <a:solidFill>
                   <a:srgbClr val="4A5B64"/>
                 </a:solidFill>
-                <a:latin typeface="Microsoft YaHei"/>
+                <a:latin typeface="微软雅黑" panose="020B0503020204020204" charset="-122"/>
               </a:rPr>
               <a:t>→</a:t>
             </a:r>
+            <a:endParaRPr sz="1700" b="1">
+              <a:solidFill>
+                <a:srgbClr val="4A5B64"/>
+              </a:solidFill>
+              <a:latin typeface="微软雅黑" panose="020B0503020204020204" charset="-122"/>
+            </a:endParaRPr>
           </a:p>
         </p:txBody>
       </p:sp>
@@ -7101,7 +7458,7 @@
           </a:fontRef>
         </p:style>
         <p:txBody>
-          <a:bodyPr rtlCol="0" anchor="ctr" wrap="square" lIns="54864" rIns="54864" tIns="27432" bIns="27432"/>
+          <a:bodyPr wrap="square" lIns="54864" tIns="27432" rIns="54864" bIns="27432" rtlCol="0" anchor="ctr"/>
           <a:lstStyle/>
           <a:p>
             <a:pPr algn="ctr">
@@ -7114,10 +7471,16 @@
                 <a:solidFill>
                   <a:srgbClr val="0D6B5C"/>
                 </a:solidFill>
-                <a:latin typeface="Microsoft YaHei"/>
+                <a:latin typeface="微软雅黑" panose="020B0503020204020204" charset="-122"/>
               </a:rPr>
               <a:t>建立健康事件</a:t>
             </a:r>
+            <a:endParaRPr sz="1350" b="1">
+              <a:solidFill>
+                <a:srgbClr val="0D6B5C"/>
+              </a:solidFill>
+              <a:latin typeface="微软雅黑" panose="020B0503020204020204" charset="-122"/>
+            </a:endParaRPr>
           </a:p>
         </p:txBody>
       </p:sp>
@@ -7138,7 +7501,7 @@
           <a:noFill/>
         </p:spPr>
         <p:txBody>
-          <a:bodyPr wrap="square" anchor="ctr" lIns="0" rIns="0" tIns="0" bIns="0">
+          <a:bodyPr wrap="square" lIns="0" tIns="0" rIns="0" bIns="0" anchor="ctr">
             <a:spAutoFit/>
           </a:bodyPr>
           <a:lstStyle/>
@@ -7159,10 +7522,16 @@
                 <a:solidFill>
                   <a:srgbClr val="4A5B64"/>
                 </a:solidFill>
-                <a:latin typeface="Microsoft YaHei"/>
+                <a:latin typeface="微软雅黑" panose="020B0503020204020204" charset="-122"/>
               </a:rPr>
               <a:t>→</a:t>
             </a:r>
+            <a:endParaRPr sz="1700" b="1">
+              <a:solidFill>
+                <a:srgbClr val="4A5B64"/>
+              </a:solidFill>
+              <a:latin typeface="微软雅黑" panose="020B0503020204020204" charset="-122"/>
+            </a:endParaRPr>
           </a:p>
         </p:txBody>
       </p:sp>
@@ -7205,7 +7574,7 @@
           </a:fontRef>
         </p:style>
         <p:txBody>
-          <a:bodyPr rtlCol="0" anchor="ctr" wrap="square" lIns="54864" rIns="54864" tIns="27432" bIns="27432"/>
+          <a:bodyPr wrap="square" lIns="54864" tIns="27432" rIns="54864" bIns="27432" rtlCol="0" anchor="ctr"/>
           <a:lstStyle/>
           <a:p>
             <a:pPr algn="ctr">
@@ -7218,10 +7587,16 @@
                 <a:solidFill>
                   <a:srgbClr val="0D6B5C"/>
                 </a:solidFill>
-                <a:latin typeface="Microsoft YaHei"/>
+                <a:latin typeface="微软雅黑" panose="020B0503020204020204" charset="-122"/>
               </a:rPr>
               <a:t>持续追踪</a:t>
             </a:r>
+            <a:endParaRPr sz="1350" b="1">
+              <a:solidFill>
+                <a:srgbClr val="0D6B5C"/>
+              </a:solidFill>
+              <a:latin typeface="微软雅黑" panose="020B0503020204020204" charset="-122"/>
+            </a:endParaRPr>
           </a:p>
         </p:txBody>
       </p:sp>
@@ -7242,7 +7617,7 @@
           <a:noFill/>
         </p:spPr>
         <p:txBody>
-          <a:bodyPr wrap="square" anchor="ctr" lIns="0" rIns="0" tIns="0" bIns="0">
+          <a:bodyPr wrap="square" lIns="0" tIns="0" rIns="0" bIns="0" anchor="ctr">
             <a:spAutoFit/>
           </a:bodyPr>
           <a:lstStyle/>
@@ -7263,10 +7638,16 @@
                 <a:solidFill>
                   <a:srgbClr val="4A5B64"/>
                 </a:solidFill>
-                <a:latin typeface="Microsoft YaHei"/>
+                <a:latin typeface="微软雅黑" panose="020B0503020204020204" charset="-122"/>
               </a:rPr>
               <a:t>→</a:t>
             </a:r>
+            <a:endParaRPr sz="1700" b="1">
+              <a:solidFill>
+                <a:srgbClr val="4A5B64"/>
+              </a:solidFill>
+              <a:latin typeface="微软雅黑" panose="020B0503020204020204" charset="-122"/>
+            </a:endParaRPr>
           </a:p>
         </p:txBody>
       </p:sp>
@@ -7309,7 +7690,7 @@
           </a:fontRef>
         </p:style>
         <p:txBody>
-          <a:bodyPr rtlCol="0" anchor="ctr" wrap="square" lIns="54864" rIns="54864" tIns="27432" bIns="27432"/>
+          <a:bodyPr wrap="square" lIns="54864" tIns="27432" rIns="54864" bIns="27432" rtlCol="0" anchor="ctr"/>
           <a:lstStyle/>
           <a:p>
             <a:pPr algn="ctr">
@@ -7322,10 +7703,16 @@
                 <a:solidFill>
                   <a:srgbClr val="0D6B5C"/>
                 </a:solidFill>
-                <a:latin typeface="Microsoft YaHei"/>
+                <a:latin typeface="微软雅黑" panose="020B0503020204020204" charset="-122"/>
               </a:rPr>
               <a:t>就医摘要</a:t>
             </a:r>
+            <a:endParaRPr sz="1350" b="1">
+              <a:solidFill>
+                <a:srgbClr val="0D6B5C"/>
+              </a:solidFill>
+              <a:latin typeface="微软雅黑" panose="020B0503020204020204" charset="-122"/>
+            </a:endParaRPr>
           </a:p>
         </p:txBody>
       </p:sp>
@@ -7346,7 +7733,7 @@
           <a:noFill/>
         </p:spPr>
         <p:txBody>
-          <a:bodyPr wrap="square" anchor="t" lIns="0" rIns="0" tIns="0" bIns="0">
+          <a:bodyPr wrap="square" lIns="0" tIns="0" rIns="0" bIns="0" anchor="t">
             <a:spAutoFit/>
           </a:bodyPr>
           <a:lstStyle/>
@@ -7367,10 +7754,16 @@
                 <a:solidFill>
                   <a:srgbClr val="4A5B64"/>
                 </a:solidFill>
-                <a:latin typeface="Microsoft YaHei"/>
+                <a:latin typeface="微软雅黑" panose="020B0503020204020204" charset="-122"/>
               </a:rPr>
               <a:t>每一步，都有据可循；每一次变化，都被记录。</a:t>
             </a:r>
+            <a:endParaRPr sz="1350" b="0">
+              <a:solidFill>
+                <a:srgbClr val="4A5B64"/>
+              </a:solidFill>
+              <a:latin typeface="微软雅黑" panose="020B0503020204020204" charset="-122"/>
+            </a:endParaRPr>
           </a:p>
         </p:txBody>
       </p:sp>
@@ -7437,7 +7830,7 @@
           <a:noFill/>
         </p:spPr>
         <p:txBody>
-          <a:bodyPr wrap="square" anchor="t" lIns="0" rIns="0" tIns="0" bIns="0">
+          <a:bodyPr wrap="square" lIns="0" tIns="0" rIns="0" bIns="0" anchor="t">
             <a:spAutoFit/>
           </a:bodyPr>
           <a:lstStyle/>
@@ -7458,10 +7851,16 @@
                 <a:solidFill>
                   <a:srgbClr val="0D6B5C"/>
                 </a:solidFill>
-                <a:latin typeface="Microsoft YaHei"/>
+                <a:latin typeface="微软雅黑" panose="020B0503020204020204" charset="-122"/>
               </a:rPr>
               <a:t>We don't replace doctors.</a:t>
             </a:r>
+            <a:endParaRPr sz="2100" b="1">
+              <a:solidFill>
+                <a:srgbClr val="0D6B5C"/>
+              </a:solidFill>
+              <a:latin typeface="微软雅黑" panose="020B0503020204020204" charset="-122"/>
+            </a:endParaRPr>
           </a:p>
         </p:txBody>
       </p:sp>
@@ -7482,7 +7881,7 @@
           <a:noFill/>
         </p:spPr>
         <p:txBody>
-          <a:bodyPr wrap="square" anchor="t" lIns="0" rIns="0" tIns="0" bIns="0">
+          <a:bodyPr wrap="square" lIns="0" tIns="0" rIns="0" bIns="0" anchor="t">
             <a:spAutoFit/>
           </a:bodyPr>
           <a:lstStyle/>
@@ -7503,10 +7902,16 @@
                 <a:solidFill>
                   <a:srgbClr val="4A5B64"/>
                 </a:solidFill>
-                <a:latin typeface="Microsoft YaHei"/>
+                <a:latin typeface="微软雅黑" panose="020B0503020204020204" charset="-122"/>
               </a:rPr>
               <a:t>We connect everyday health uncertainty with professional care.</a:t>
             </a:r>
+            <a:endParaRPr sz="1400" b="0">
+              <a:solidFill>
+                <a:srgbClr val="4A5B64"/>
+              </a:solidFill>
+              <a:latin typeface="微软雅黑" panose="020B0503020204020204" charset="-122"/>
+            </a:endParaRPr>
           </a:p>
         </p:txBody>
       </p:sp>
@@ -7527,7 +7932,7 @@
           <a:noFill/>
         </p:spPr>
         <p:txBody>
-          <a:bodyPr wrap="square" anchor="t" lIns="0" rIns="0" tIns="0" bIns="0">
+          <a:bodyPr wrap="square" lIns="0" tIns="0" rIns="0" bIns="0" anchor="t">
             <a:spAutoFit/>
           </a:bodyPr>
           <a:lstStyle/>
@@ -7548,10 +7953,16 @@
                 <a:solidFill>
                   <a:srgbClr val="8A99A2"/>
                 </a:solidFill>
-                <a:latin typeface="Microsoft YaHei"/>
+                <a:latin typeface="微软雅黑" panose="020B0503020204020204" charset="-122"/>
               </a:rPr>
               <a:t>AI Health Navigator · 团队招募</a:t>
             </a:r>
+            <a:endParaRPr sz="1000" b="0">
+              <a:solidFill>
+                <a:srgbClr val="8A99A2"/>
+              </a:solidFill>
+              <a:latin typeface="微软雅黑" panose="020B0503020204020204" charset="-122"/>
+            </a:endParaRPr>
           </a:p>
         </p:txBody>
       </p:sp>
@@ -7572,7 +7983,7 @@
           <a:noFill/>
         </p:spPr>
         <p:txBody>
-          <a:bodyPr wrap="square" anchor="t" lIns="0" rIns="0" tIns="0" bIns="0">
+          <a:bodyPr wrap="square" lIns="0" tIns="0" rIns="0" bIns="0" anchor="t">
             <a:spAutoFit/>
           </a:bodyPr>
           <a:lstStyle/>
@@ -7593,10 +8004,16 @@
                 <a:solidFill>
                   <a:srgbClr val="4A5B64"/>
                 </a:solidFill>
-                <a:latin typeface="Microsoft YaHei"/>
+                <a:latin typeface="微软雅黑" panose="020B0503020204020204" charset="-122"/>
               </a:rPr>
               <a:t>4</a:t>
             </a:r>
+            <a:endParaRPr sz="1100" b="1">
+              <a:solidFill>
+                <a:srgbClr val="4A5B64"/>
+              </a:solidFill>
+              <a:latin typeface="微软雅黑" panose="020B0503020204020204" charset="-122"/>
+            </a:endParaRPr>
           </a:p>
         </p:txBody>
       </p:sp>
@@ -7609,7 +8026,7 @@
 </file>
 
 <file path=ppt/slides/slide5.xml><?xml version="1.0" encoding="utf-8"?>
-<p:sld xmlns:a="http://schemas.openxmlformats.org/drawingml/2006/main" xmlns:p="http://schemas.openxmlformats.org/presentationml/2006/main" xmlns:r="http://schemas.openxmlformats.org/officeDocument/2006/relationships">
+<p:sld xmlns:a="http://schemas.openxmlformats.org/drawingml/2006/main" xmlns:r="http://schemas.openxmlformats.org/officeDocument/2006/relationships" xmlns:p="http://schemas.openxmlformats.org/presentationml/2006/main">
   <p:cSld>
     <p:bg>
       <p:bgPr>
@@ -7687,7 +8104,7 @@
           <a:noFill/>
         </p:spPr>
         <p:txBody>
-          <a:bodyPr wrap="square" anchor="t" lIns="0" rIns="0" tIns="0" bIns="0">
+          <a:bodyPr wrap="square" lIns="0" tIns="0" rIns="0" bIns="0" anchor="t">
             <a:spAutoFit/>
           </a:bodyPr>
           <a:lstStyle/>
@@ -7708,10 +8125,16 @@
                 <a:solidFill>
                   <a:srgbClr val="0D6B5C"/>
                 </a:solidFill>
-                <a:latin typeface="Microsoft YaHei"/>
+                <a:latin typeface="微软雅黑" panose="020B0503020204020204" charset="-122"/>
               </a:rPr>
               <a:t>04 · 为什么现在</a:t>
             </a:r>
+            <a:endParaRPr sz="1300" b="1">
+              <a:solidFill>
+                <a:srgbClr val="0D6B5C"/>
+              </a:solidFill>
+              <a:latin typeface="微软雅黑" panose="020B0503020204020204" charset="-122"/>
+            </a:endParaRPr>
           </a:p>
         </p:txBody>
       </p:sp>
@@ -7732,7 +8155,7 @@
           <a:noFill/>
         </p:spPr>
         <p:txBody>
-          <a:bodyPr wrap="square" anchor="t" lIns="0" rIns="0" tIns="0" bIns="0">
+          <a:bodyPr wrap="square" lIns="0" tIns="0" rIns="0" bIns="0" anchor="t">
             <a:spAutoFit/>
           </a:bodyPr>
           <a:lstStyle/>
@@ -7753,10 +8176,16 @@
                 <a:solidFill>
                   <a:srgbClr val="10222B"/>
                 </a:solidFill>
-                <a:latin typeface="Microsoft YaHei"/>
+                <a:latin typeface="微软雅黑" panose="020B0503020204020204" charset="-122"/>
               </a:rPr>
               <a:t>三个趋势在此交汇</a:t>
             </a:r>
+            <a:endParaRPr sz="3100" b="1">
+              <a:solidFill>
+                <a:srgbClr val="10222B"/>
+              </a:solidFill>
+              <a:latin typeface="微软雅黑" panose="020B0503020204020204" charset="-122"/>
+            </a:endParaRPr>
           </a:p>
         </p:txBody>
       </p:sp>
@@ -7825,7 +8254,7 @@
           <a:noFill/>
         </p:spPr>
         <p:txBody>
-          <a:bodyPr wrap="square" anchor="t" lIns="0" rIns="0" tIns="0" bIns="0">
+          <a:bodyPr wrap="square" lIns="0" tIns="0" rIns="0" bIns="0" anchor="t">
             <a:spAutoFit/>
           </a:bodyPr>
           <a:lstStyle/>
@@ -7846,10 +8275,16 @@
                 <a:solidFill>
                   <a:srgbClr val="0D6B5C"/>
                 </a:solidFill>
-                <a:latin typeface="Microsoft YaHei"/>
+                <a:latin typeface="微软雅黑" panose="020B0503020204020204" charset="-122"/>
               </a:rPr>
               <a:t>AI</a:t>
             </a:r>
+            <a:endParaRPr sz="2000" b="1">
+              <a:solidFill>
+                <a:srgbClr val="0D6B5C"/>
+              </a:solidFill>
+              <a:latin typeface="微软雅黑" panose="020B0503020204020204" charset="-122"/>
+            </a:endParaRPr>
           </a:p>
         </p:txBody>
       </p:sp>
@@ -7870,7 +8305,7 @@
           <a:noFill/>
         </p:spPr>
         <p:txBody>
-          <a:bodyPr wrap="square" anchor="t" lIns="0" rIns="0" tIns="0" bIns="0">
+          <a:bodyPr wrap="square" lIns="0" tIns="0" rIns="0" bIns="0" anchor="t">
             <a:spAutoFit/>
           </a:bodyPr>
           <a:lstStyle/>
@@ -7891,10 +8326,16 @@
                 <a:solidFill>
                   <a:srgbClr val="4A5B64"/>
                 </a:solidFill>
-                <a:latin typeface="Microsoft YaHei"/>
+                <a:latin typeface="微软雅黑" panose="020B0503020204020204" charset="-122"/>
               </a:rPr>
               <a:t>LLM 让多轮、可解释的对话式问询真正可用，不再是关键词匹配。</a:t>
             </a:r>
+            <a:endParaRPr sz="1400" b="0">
+              <a:solidFill>
+                <a:srgbClr val="4A5B64"/>
+              </a:solidFill>
+              <a:latin typeface="微软雅黑" panose="020B0503020204020204" charset="-122"/>
+            </a:endParaRPr>
           </a:p>
         </p:txBody>
       </p:sp>
@@ -7963,7 +8404,7 @@
           <a:noFill/>
         </p:spPr>
         <p:txBody>
-          <a:bodyPr wrap="square" anchor="t" lIns="0" rIns="0" tIns="0" bIns="0">
+          <a:bodyPr wrap="square" lIns="0" tIns="0" rIns="0" bIns="0" anchor="t">
             <a:spAutoFit/>
           </a:bodyPr>
           <a:lstStyle/>
@@ -7984,10 +8425,16 @@
                 <a:solidFill>
                   <a:srgbClr val="0D6B5C"/>
                 </a:solidFill>
-                <a:latin typeface="Microsoft YaHei"/>
+                <a:latin typeface="微软雅黑" panose="020B0503020204020204" charset="-122"/>
               </a:rPr>
               <a:t>Data</a:t>
             </a:r>
+            <a:endParaRPr sz="2000" b="1">
+              <a:solidFill>
+                <a:srgbClr val="0D6B5C"/>
+              </a:solidFill>
+              <a:latin typeface="微软雅黑" panose="020B0503020204020204" charset="-122"/>
+            </a:endParaRPr>
           </a:p>
         </p:txBody>
       </p:sp>
@@ -8008,7 +8455,7 @@
           <a:noFill/>
         </p:spPr>
         <p:txBody>
-          <a:bodyPr wrap="square" anchor="t" lIns="0" rIns="0" tIns="0" bIns="0">
+          <a:bodyPr wrap="square" lIns="0" tIns="0" rIns="0" bIns="0" anchor="t">
             <a:spAutoFit/>
           </a:bodyPr>
           <a:lstStyle/>
@@ -8029,10 +8476,16 @@
                 <a:solidFill>
                   <a:srgbClr val="4A5B64"/>
                 </a:solidFill>
-                <a:latin typeface="Microsoft YaHei"/>
+                <a:latin typeface="微软雅黑" panose="020B0503020204020204" charset="-122"/>
               </a:rPr>
               <a:t>个人健康数据（可穿戴 / 手动记录）终于可以被持续追踪与解释。</a:t>
             </a:r>
+            <a:endParaRPr sz="1400" b="0">
+              <a:solidFill>
+                <a:srgbClr val="4A5B64"/>
+              </a:solidFill>
+              <a:latin typeface="微软雅黑" panose="020B0503020204020204" charset="-122"/>
+            </a:endParaRPr>
           </a:p>
         </p:txBody>
       </p:sp>
@@ -8101,7 +8554,7 @@
           <a:noFill/>
         </p:spPr>
         <p:txBody>
-          <a:bodyPr wrap="square" anchor="t" lIns="0" rIns="0" tIns="0" bIns="0">
+          <a:bodyPr wrap="square" lIns="0" tIns="0" rIns="0" bIns="0" anchor="t">
             <a:spAutoFit/>
           </a:bodyPr>
           <a:lstStyle/>
@@ -8122,10 +8575,16 @@
                 <a:solidFill>
                   <a:srgbClr val="0D6B5C"/>
                 </a:solidFill>
-                <a:latin typeface="Microsoft YaHei"/>
+                <a:latin typeface="微软雅黑" panose="020B0503020204020204" charset="-122"/>
               </a:rPr>
               <a:t>Healthcare Gap</a:t>
             </a:r>
+            <a:endParaRPr sz="2000" b="1">
+              <a:solidFill>
+                <a:srgbClr val="0D6B5C"/>
+              </a:solidFill>
+              <a:latin typeface="微软雅黑" panose="020B0503020204020204" charset="-122"/>
+            </a:endParaRPr>
           </a:p>
         </p:txBody>
       </p:sp>
@@ -8146,7 +8605,7 @@
           <a:noFill/>
         </p:spPr>
         <p:txBody>
-          <a:bodyPr wrap="square" anchor="t" lIns="0" rIns="0" tIns="0" bIns="0">
+          <a:bodyPr wrap="square" lIns="0" tIns="0" rIns="0" bIns="0" anchor="t">
             <a:spAutoFit/>
           </a:bodyPr>
           <a:lstStyle/>
@@ -8167,10 +8626,16 @@
                 <a:solidFill>
                   <a:srgbClr val="4A5B64"/>
                 </a:solidFill>
-                <a:latin typeface="Microsoft YaHei"/>
+                <a:latin typeface="微软雅黑" panose="020B0503020204020204" charset="-122"/>
               </a:rPr>
               <a:t>日常的不确定与专业医疗之间，缺一个可信的连接层。</a:t>
             </a:r>
+            <a:endParaRPr sz="1400" b="0">
+              <a:solidFill>
+                <a:srgbClr val="4A5B64"/>
+              </a:solidFill>
+              <a:latin typeface="微软雅黑" panose="020B0503020204020204" charset="-122"/>
+            </a:endParaRPr>
           </a:p>
         </p:txBody>
       </p:sp>
@@ -8191,7 +8656,7 @@
           <a:noFill/>
         </p:spPr>
         <p:txBody>
-          <a:bodyPr wrap="square" anchor="t" lIns="0" rIns="0" tIns="0" bIns="0">
+          <a:bodyPr wrap="square" lIns="0" tIns="0" rIns="0" bIns="0" anchor="t">
             <a:spAutoFit/>
           </a:bodyPr>
           <a:lstStyle/>
@@ -8212,10 +8677,16 @@
                 <a:solidFill>
                   <a:srgbClr val="10222B"/>
                 </a:solidFill>
-                <a:latin typeface="Microsoft YaHei"/>
+                <a:latin typeface="微软雅黑" panose="020B0503020204020204" charset="-122"/>
               </a:rPr>
               <a:t>现在做，不是「能做什么」，而是「正好能做」。</a:t>
             </a:r>
+            <a:endParaRPr sz="1400" b="1">
+              <a:solidFill>
+                <a:srgbClr val="10222B"/>
+              </a:solidFill>
+              <a:latin typeface="微软雅黑" panose="020B0503020204020204" charset="-122"/>
+            </a:endParaRPr>
           </a:p>
         </p:txBody>
       </p:sp>
@@ -8236,7 +8707,7 @@
           <a:noFill/>
         </p:spPr>
         <p:txBody>
-          <a:bodyPr wrap="square" anchor="t" lIns="0" rIns="0" tIns="0" bIns="0">
+          <a:bodyPr wrap="square" lIns="0" tIns="0" rIns="0" bIns="0" anchor="t">
             <a:spAutoFit/>
           </a:bodyPr>
           <a:lstStyle/>
@@ -8257,10 +8728,16 @@
                 <a:solidFill>
                   <a:srgbClr val="8A99A2"/>
                 </a:solidFill>
-                <a:latin typeface="Microsoft YaHei"/>
+                <a:latin typeface="微软雅黑" panose="020B0503020204020204" charset="-122"/>
               </a:rPr>
               <a:t>AI Health Navigator · 团队招募</a:t>
             </a:r>
+            <a:endParaRPr sz="1000" b="0">
+              <a:solidFill>
+                <a:srgbClr val="8A99A2"/>
+              </a:solidFill>
+              <a:latin typeface="微软雅黑" panose="020B0503020204020204" charset="-122"/>
+            </a:endParaRPr>
           </a:p>
         </p:txBody>
       </p:sp>
@@ -8281,7 +8758,7 @@
           <a:noFill/>
         </p:spPr>
         <p:txBody>
-          <a:bodyPr wrap="square" anchor="t" lIns="0" rIns="0" tIns="0" bIns="0">
+          <a:bodyPr wrap="square" lIns="0" tIns="0" rIns="0" bIns="0" anchor="t">
             <a:spAutoFit/>
           </a:bodyPr>
           <a:lstStyle/>
@@ -8302,10 +8779,16 @@
                 <a:solidFill>
                   <a:srgbClr val="4A5B64"/>
                 </a:solidFill>
-                <a:latin typeface="Microsoft YaHei"/>
+                <a:latin typeface="微软雅黑" panose="020B0503020204020204" charset="-122"/>
               </a:rPr>
               <a:t>5</a:t>
             </a:r>
+            <a:endParaRPr sz="1100" b="1">
+              <a:solidFill>
+                <a:srgbClr val="4A5B64"/>
+              </a:solidFill>
+              <a:latin typeface="微软雅黑" panose="020B0503020204020204" charset="-122"/>
+            </a:endParaRPr>
           </a:p>
         </p:txBody>
       </p:sp>
@@ -8318,7 +8801,7 @@
 </file>
 
 <file path=ppt/slides/slide6.xml><?xml version="1.0" encoding="utf-8"?>
-<p:sld xmlns:a="http://schemas.openxmlformats.org/drawingml/2006/main" xmlns:p="http://schemas.openxmlformats.org/presentationml/2006/main" xmlns:r="http://schemas.openxmlformats.org/officeDocument/2006/relationships">
+<p:sld xmlns:a="http://schemas.openxmlformats.org/drawingml/2006/main" xmlns:r="http://schemas.openxmlformats.org/officeDocument/2006/relationships" xmlns:p="http://schemas.openxmlformats.org/presentationml/2006/main">
   <p:cSld>
     <p:bg>
       <p:bgPr>
@@ -8396,7 +8879,7 @@
           <a:noFill/>
         </p:spPr>
         <p:txBody>
-          <a:bodyPr wrap="square" anchor="t" lIns="0" rIns="0" tIns="0" bIns="0">
+          <a:bodyPr wrap="square" lIns="0" tIns="0" rIns="0" bIns="0" anchor="t">
             <a:spAutoFit/>
           </a:bodyPr>
           <a:lstStyle/>
@@ -8417,10 +8900,16 @@
                 <a:solidFill>
                   <a:srgbClr val="0D6B5C"/>
                 </a:solidFill>
-                <a:latin typeface="Microsoft YaHei"/>
+                <a:latin typeface="微软雅黑" panose="020B0503020204020204" charset="-122"/>
               </a:rPr>
               <a:t>05 · 进度</a:t>
             </a:r>
+            <a:endParaRPr sz="1300" b="1">
+              <a:solidFill>
+                <a:srgbClr val="0D6B5C"/>
+              </a:solidFill>
+              <a:latin typeface="微软雅黑" panose="020B0503020204020204" charset="-122"/>
+            </a:endParaRPr>
           </a:p>
         </p:txBody>
       </p:sp>
@@ -8441,7 +8930,7 @@
           <a:noFill/>
         </p:spPr>
         <p:txBody>
-          <a:bodyPr wrap="square" anchor="t" lIns="0" rIns="0" tIns="0" bIns="0">
+          <a:bodyPr wrap="square" lIns="0" tIns="0" rIns="0" bIns="0" anchor="t">
             <a:spAutoFit/>
           </a:bodyPr>
           <a:lstStyle/>
@@ -8462,10 +8951,16 @@
                 <a:solidFill>
                   <a:srgbClr val="10222B"/>
                 </a:solidFill>
-                <a:latin typeface="Microsoft YaHei"/>
+                <a:latin typeface="微软雅黑" panose="020B0503020204020204" charset="-122"/>
               </a:rPr>
               <a:t>已经不是一张 PPT</a:t>
             </a:r>
+            <a:endParaRPr sz="3100" b="1">
+              <a:solidFill>
+                <a:srgbClr val="10222B"/>
+              </a:solidFill>
+              <a:latin typeface="微软雅黑" panose="020B0503020204020204" charset="-122"/>
+            </a:endParaRPr>
           </a:p>
         </p:txBody>
       </p:sp>
@@ -8486,7 +8981,7 @@
           <a:noFill/>
         </p:spPr>
         <p:txBody>
-          <a:bodyPr wrap="square" anchor="t" lIns="0" rIns="0" tIns="0" bIns="0">
+          <a:bodyPr wrap="square" lIns="0" tIns="0" rIns="0" bIns="0" anchor="t">
             <a:spAutoFit/>
           </a:bodyPr>
           <a:lstStyle/>
@@ -8507,10 +9002,16 @@
                 <a:solidFill>
                   <a:srgbClr val="0D6B5C"/>
                 </a:solidFill>
-                <a:latin typeface="Microsoft YaHei"/>
+                <a:latin typeface="微软雅黑" panose="020B0503020204020204" charset="-122"/>
               </a:rPr>
               <a:t>已完成</a:t>
             </a:r>
+            <a:endParaRPr sz="1300" b="1">
+              <a:solidFill>
+                <a:srgbClr val="0D6B5C"/>
+              </a:solidFill>
+              <a:latin typeface="微软雅黑" panose="020B0503020204020204" charset="-122"/>
+            </a:endParaRPr>
           </a:p>
         </p:txBody>
       </p:sp>
@@ -8531,7 +9032,7 @@
           <a:noFill/>
         </p:spPr>
         <p:txBody>
-          <a:bodyPr wrap="square" anchor="t" lIns="0" rIns="0" tIns="0" bIns="0">
+          <a:bodyPr wrap="square" lIns="0" tIns="0" rIns="0" bIns="0" anchor="t">
             <a:spAutoFit/>
           </a:bodyPr>
           <a:lstStyle/>
@@ -8552,10 +9053,16 @@
                 <a:solidFill>
                   <a:srgbClr val="17B897"/>
                 </a:solidFill>
-                <a:latin typeface="Microsoft YaHei"/>
+                <a:latin typeface="微软雅黑" panose="020B0503020204020204" charset="-122"/>
               </a:rPr>
               <a:t>✓</a:t>
             </a:r>
+            <a:endParaRPr sz="2000" b="1">
+              <a:solidFill>
+                <a:srgbClr val="17B897"/>
+              </a:solidFill>
+              <a:latin typeface="微软雅黑" panose="020B0503020204020204" charset="-122"/>
+            </a:endParaRPr>
           </a:p>
         </p:txBody>
       </p:sp>
@@ -8576,7 +9083,7 @@
           <a:noFill/>
         </p:spPr>
         <p:txBody>
-          <a:bodyPr wrap="square" anchor="t" lIns="0" rIns="0" tIns="0" bIns="0">
+          <a:bodyPr wrap="square" lIns="0" tIns="0" rIns="0" bIns="0" anchor="t">
             <a:spAutoFit/>
           </a:bodyPr>
           <a:lstStyle/>
@@ -8597,10 +9104,16 @@
                 <a:solidFill>
                   <a:srgbClr val="10222B"/>
                 </a:solidFill>
-                <a:latin typeface="Microsoft YaHei"/>
+                <a:latin typeface="微软雅黑" panose="020B0503020204020204" charset="-122"/>
               </a:rPr>
               <a:t>可交互 Web Demo</a:t>
             </a:r>
+            <a:endParaRPr sz="1550" b="1">
+              <a:solidFill>
+                <a:srgbClr val="10222B"/>
+              </a:solidFill>
+              <a:latin typeface="微软雅黑" panose="020B0503020204020204" charset="-122"/>
+            </a:endParaRPr>
           </a:p>
         </p:txBody>
       </p:sp>
@@ -8621,7 +9134,7 @@
           <a:noFill/>
         </p:spPr>
         <p:txBody>
-          <a:bodyPr wrap="square" anchor="t" lIns="0" rIns="0" tIns="0" bIns="0">
+          <a:bodyPr wrap="square" lIns="0" tIns="0" rIns="0" bIns="0" anchor="t">
             <a:spAutoFit/>
           </a:bodyPr>
           <a:lstStyle/>
@@ -8642,10 +9155,16 @@
                 <a:solidFill>
                   <a:srgbClr val="4A5B64"/>
                 </a:solidFill>
-                <a:latin typeface="Microsoft YaHei"/>
+                <a:latin typeface="微软雅黑" panose="020B0503020204020204" charset="-122"/>
               </a:rPr>
               <a:t>首页 / 结构化问询 / Episode 时间线 / 症状趋势 / 就医摘要</a:t>
             </a:r>
+            <a:endParaRPr sz="1200" b="0">
+              <a:solidFill>
+                <a:srgbClr val="4A5B64"/>
+              </a:solidFill>
+              <a:latin typeface="微软雅黑" panose="020B0503020204020204" charset="-122"/>
+            </a:endParaRPr>
           </a:p>
         </p:txBody>
       </p:sp>
@@ -8666,7 +9185,7 @@
           <a:noFill/>
         </p:spPr>
         <p:txBody>
-          <a:bodyPr wrap="square" anchor="t" lIns="0" rIns="0" tIns="0" bIns="0">
+          <a:bodyPr wrap="square" lIns="0" tIns="0" rIns="0" bIns="0" anchor="t">
             <a:spAutoFit/>
           </a:bodyPr>
           <a:lstStyle/>
@@ -8687,10 +9206,16 @@
                 <a:solidFill>
                   <a:srgbClr val="17B897"/>
                 </a:solidFill>
-                <a:latin typeface="Microsoft YaHei"/>
+                <a:latin typeface="微软雅黑" panose="020B0503020204020204" charset="-122"/>
               </a:rPr>
               <a:t>✓</a:t>
             </a:r>
+            <a:endParaRPr sz="2000" b="1">
+              <a:solidFill>
+                <a:srgbClr val="17B897"/>
+              </a:solidFill>
+              <a:latin typeface="微软雅黑" panose="020B0503020204020204" charset="-122"/>
+            </a:endParaRPr>
           </a:p>
         </p:txBody>
       </p:sp>
@@ -8711,7 +9236,7 @@
           <a:noFill/>
         </p:spPr>
         <p:txBody>
-          <a:bodyPr wrap="square" anchor="t" lIns="0" rIns="0" tIns="0" bIns="0">
+          <a:bodyPr wrap="square" lIns="0" tIns="0" rIns="0" bIns="0" anchor="t">
             <a:spAutoFit/>
           </a:bodyPr>
           <a:lstStyle/>
@@ -8732,10 +9257,16 @@
                 <a:solidFill>
                   <a:srgbClr val="10222B"/>
                 </a:solidFill>
-                <a:latin typeface="Microsoft YaHei"/>
+                <a:latin typeface="微软雅黑" panose="020B0503020204020204" charset="-122"/>
               </a:rPr>
               <a:t>项目 Demo PPT + 演示动画</a:t>
             </a:r>
+            <a:endParaRPr sz="1550" b="1">
+              <a:solidFill>
+                <a:srgbClr val="10222B"/>
+              </a:solidFill>
+              <a:latin typeface="微软雅黑" panose="020B0503020204020204" charset="-122"/>
+            </a:endParaRPr>
           </a:p>
         </p:txBody>
       </p:sp>
@@ -8756,7 +9287,7 @@
           <a:noFill/>
         </p:spPr>
         <p:txBody>
-          <a:bodyPr wrap="square" anchor="t" lIns="0" rIns="0" tIns="0" bIns="0">
+          <a:bodyPr wrap="square" lIns="0" tIns="0" rIns="0" bIns="0" anchor="t">
             <a:spAutoFit/>
           </a:bodyPr>
           <a:lstStyle/>
@@ -8777,10 +9308,16 @@
                 <a:solidFill>
                   <a:srgbClr val="4A5B64"/>
                 </a:solidFill>
-                <a:latin typeface="Microsoft YaHei"/>
+                <a:latin typeface="微软雅黑" panose="020B0503020204020204" charset="-122"/>
               </a:rPr>
               <a:t>产品定位、核心用户流程、商业模式</a:t>
             </a:r>
+            <a:endParaRPr sz="1200" b="0">
+              <a:solidFill>
+                <a:srgbClr val="4A5B64"/>
+              </a:solidFill>
+              <a:latin typeface="微软雅黑" panose="020B0503020204020204" charset="-122"/>
+            </a:endParaRPr>
           </a:p>
         </p:txBody>
       </p:sp>
@@ -8801,7 +9338,7 @@
           <a:noFill/>
         </p:spPr>
         <p:txBody>
-          <a:bodyPr wrap="square" anchor="t" lIns="0" rIns="0" tIns="0" bIns="0">
+          <a:bodyPr wrap="square" lIns="0" tIns="0" rIns="0" bIns="0" anchor="t">
             <a:spAutoFit/>
           </a:bodyPr>
           <a:lstStyle/>
@@ -8822,10 +9359,16 @@
                 <a:solidFill>
                   <a:srgbClr val="17B897"/>
                 </a:solidFill>
-                <a:latin typeface="Microsoft YaHei"/>
+                <a:latin typeface="微软雅黑" panose="020B0503020204020204" charset="-122"/>
               </a:rPr>
               <a:t>✓</a:t>
             </a:r>
+            <a:endParaRPr sz="2000" b="1">
+              <a:solidFill>
+                <a:srgbClr val="17B897"/>
+              </a:solidFill>
+              <a:latin typeface="微软雅黑" panose="020B0503020204020204" charset="-122"/>
+            </a:endParaRPr>
           </a:p>
         </p:txBody>
       </p:sp>
@@ -8846,7 +9389,7 @@
           <a:noFill/>
         </p:spPr>
         <p:txBody>
-          <a:bodyPr wrap="square" anchor="t" lIns="0" rIns="0" tIns="0" bIns="0">
+          <a:bodyPr wrap="square" lIns="0" tIns="0" rIns="0" bIns="0" anchor="t">
             <a:spAutoFit/>
           </a:bodyPr>
           <a:lstStyle/>
@@ -8867,10 +9410,16 @@
                 <a:solidFill>
                   <a:srgbClr val="10222B"/>
                 </a:solidFill>
-                <a:latin typeface="Microsoft YaHei"/>
+                <a:latin typeface="微软雅黑" panose="020B0503020204020204" charset="-122"/>
               </a:rPr>
               <a:t>产品定位与核心流程</a:t>
             </a:r>
+            <a:endParaRPr sz="1550" b="1">
+              <a:solidFill>
+                <a:srgbClr val="10222B"/>
+              </a:solidFill>
+              <a:latin typeface="微软雅黑" panose="020B0503020204020204" charset="-122"/>
+            </a:endParaRPr>
           </a:p>
         </p:txBody>
       </p:sp>
@@ -8891,7 +9440,7 @@
           <a:noFill/>
         </p:spPr>
         <p:txBody>
-          <a:bodyPr wrap="square" anchor="t" lIns="0" rIns="0" tIns="0" bIns="0">
+          <a:bodyPr wrap="square" lIns="0" tIns="0" rIns="0" bIns="0" anchor="t">
             <a:spAutoFit/>
           </a:bodyPr>
           <a:lstStyle/>
@@ -8912,10 +9461,16 @@
                 <a:solidFill>
                   <a:srgbClr val="4A5B64"/>
                 </a:solidFill>
-                <a:latin typeface="Microsoft YaHei"/>
+                <a:latin typeface="微软雅黑" panose="020B0503020204020204" charset="-122"/>
               </a:rPr>
               <a:t>Self-Triage · Health Episode · Follow-up · Handoff</a:t>
             </a:r>
+            <a:endParaRPr sz="1200" b="0">
+              <a:solidFill>
+                <a:srgbClr val="4A5B64"/>
+              </a:solidFill>
+              <a:latin typeface="微软雅黑" panose="020B0503020204020204" charset="-122"/>
+            </a:endParaRPr>
           </a:p>
         </p:txBody>
       </p:sp>
@@ -8936,7 +9491,7 @@
           <a:noFill/>
         </p:spPr>
         <p:txBody>
-          <a:bodyPr wrap="square" anchor="t" lIns="0" rIns="0" tIns="0" bIns="0">
+          <a:bodyPr wrap="square" lIns="0" tIns="0" rIns="0" bIns="0" anchor="t">
             <a:spAutoFit/>
           </a:bodyPr>
           <a:lstStyle/>
@@ -8957,10 +9512,16 @@
                 <a:solidFill>
                   <a:srgbClr val="10222B"/>
                 </a:solidFill>
-                <a:latin typeface="Microsoft YaHei"/>
+                <a:latin typeface="微软雅黑" panose="020B0503020204020204" charset="-122"/>
               </a:rPr>
               <a:t>下一步：真实用户访谈 → 快速迭代 → 验证假设</a:t>
             </a:r>
+            <a:endParaRPr sz="1350" b="1">
+              <a:solidFill>
+                <a:srgbClr val="10222B"/>
+              </a:solidFill>
+              <a:latin typeface="微软雅黑" panose="020B0503020204020204" charset="-122"/>
+            </a:endParaRPr>
           </a:p>
         </p:txBody>
       </p:sp>
@@ -9077,7 +9638,7 @@
           <a:noFill/>
         </p:spPr>
         <p:txBody>
-          <a:bodyPr wrap="square" anchor="t" lIns="0" rIns="0" tIns="0" bIns="0">
+          <a:bodyPr wrap="square" lIns="0" tIns="0" rIns="0" bIns="0" anchor="t">
             <a:spAutoFit/>
           </a:bodyPr>
           <a:lstStyle/>
@@ -9098,10 +9659,16 @@
                 <a:solidFill>
                   <a:srgbClr val="0D6B5C"/>
                 </a:solidFill>
-                <a:latin typeface="Microsoft YaHei"/>
+                <a:latin typeface="微软雅黑" panose="020B0503020204020204" charset="-122"/>
               </a:rPr>
               <a:t>Demo 二维码</a:t>
             </a:r>
+            <a:endParaRPr sz="1300" b="1">
+              <a:solidFill>
+                <a:srgbClr val="0D6B5C"/>
+              </a:solidFill>
+              <a:latin typeface="微软雅黑" panose="020B0503020204020204" charset="-122"/>
+            </a:endParaRPr>
           </a:p>
         </p:txBody>
       </p:sp>
@@ -9122,7 +9689,7 @@
           <a:noFill/>
         </p:spPr>
         <p:txBody>
-          <a:bodyPr wrap="square" anchor="t" lIns="0" rIns="0" tIns="0" bIns="0">
+          <a:bodyPr wrap="square" lIns="0" tIns="0" rIns="0" bIns="0" anchor="t">
             <a:spAutoFit/>
           </a:bodyPr>
           <a:lstStyle/>
@@ -9143,10 +9710,16 @@
                 <a:solidFill>
                   <a:srgbClr val="10222B"/>
                 </a:solidFill>
-                <a:latin typeface="Microsoft YaHei"/>
+                <a:latin typeface="微软雅黑" panose="020B0503020204020204" charset="-122"/>
               </a:rPr>
               <a:t>扫码体验可交互 Demo</a:t>
             </a:r>
+            <a:endParaRPr sz="1500" b="1">
+              <a:solidFill>
+                <a:srgbClr val="10222B"/>
+              </a:solidFill>
+              <a:latin typeface="微软雅黑" panose="020B0503020204020204" charset="-122"/>
+            </a:endParaRPr>
           </a:p>
         </p:txBody>
       </p:sp>
@@ -9167,7 +9740,7 @@
           <a:noFill/>
         </p:spPr>
         <p:txBody>
-          <a:bodyPr wrap="square" anchor="t" lIns="0" rIns="0" tIns="0" bIns="0">
+          <a:bodyPr wrap="square" lIns="0" tIns="0" rIns="0" bIns="0" anchor="t">
             <a:spAutoFit/>
           </a:bodyPr>
           <a:lstStyle/>
@@ -9188,10 +9761,16 @@
                 <a:solidFill>
                   <a:srgbClr val="8A99A2"/>
                 </a:solidFill>
-                <a:latin typeface="Microsoft YaHei"/>
+                <a:latin typeface="微软雅黑" panose="020B0503020204020204" charset="-122"/>
               </a:rPr>
               <a:t>AI Health Navigator · 团队招募</a:t>
             </a:r>
+            <a:endParaRPr sz="1000" b="0">
+              <a:solidFill>
+                <a:srgbClr val="8A99A2"/>
+              </a:solidFill>
+              <a:latin typeface="微软雅黑" panose="020B0503020204020204" charset="-122"/>
+            </a:endParaRPr>
           </a:p>
         </p:txBody>
       </p:sp>
@@ -9212,7 +9791,7 @@
           <a:noFill/>
         </p:spPr>
         <p:txBody>
-          <a:bodyPr wrap="square" anchor="t" lIns="0" rIns="0" tIns="0" bIns="0">
+          <a:bodyPr wrap="square" lIns="0" tIns="0" rIns="0" bIns="0" anchor="t">
             <a:spAutoFit/>
           </a:bodyPr>
           <a:lstStyle/>
@@ -9233,10 +9812,16 @@
                 <a:solidFill>
                   <a:srgbClr val="4A5B64"/>
                 </a:solidFill>
-                <a:latin typeface="Microsoft YaHei"/>
+                <a:latin typeface="微软雅黑" panose="020B0503020204020204" charset="-122"/>
               </a:rPr>
               <a:t>6</a:t>
             </a:r>
+            <a:endParaRPr sz="1100" b="1">
+              <a:solidFill>
+                <a:srgbClr val="4A5B64"/>
+              </a:solidFill>
+              <a:latin typeface="微软雅黑" panose="020B0503020204020204" charset="-122"/>
+            </a:endParaRPr>
           </a:p>
         </p:txBody>
       </p:sp>
@@ -9249,7 +9834,7 @@
 </file>
 
 <file path=ppt/slides/slide7.xml><?xml version="1.0" encoding="utf-8"?>
-<p:sld xmlns:a="http://schemas.openxmlformats.org/drawingml/2006/main" xmlns:p="http://schemas.openxmlformats.org/presentationml/2006/main" xmlns:r="http://schemas.openxmlformats.org/officeDocument/2006/relationships">
+<p:sld xmlns:a="http://schemas.openxmlformats.org/drawingml/2006/main" xmlns:r="http://schemas.openxmlformats.org/officeDocument/2006/relationships" xmlns:p="http://schemas.openxmlformats.org/presentationml/2006/main">
   <p:cSld>
     <p:bg>
       <p:bgPr>
@@ -9327,7 +9912,7 @@
           <a:noFill/>
         </p:spPr>
         <p:txBody>
-          <a:bodyPr wrap="square" anchor="t" lIns="0" rIns="0" tIns="0" bIns="0">
+          <a:bodyPr wrap="square" lIns="0" tIns="0" rIns="0" bIns="0" anchor="t">
             <a:spAutoFit/>
           </a:bodyPr>
           <a:lstStyle/>
@@ -9348,10 +9933,16 @@
                 <a:solidFill>
                   <a:srgbClr val="0D6B5C"/>
                 </a:solidFill>
-                <a:latin typeface="Microsoft YaHei"/>
+                <a:latin typeface="微软雅黑" panose="020B0503020204020204" charset="-122"/>
               </a:rPr>
               <a:t>06 · 找谁</a:t>
             </a:r>
+            <a:endParaRPr sz="1300" b="1">
+              <a:solidFill>
+                <a:srgbClr val="0D6B5C"/>
+              </a:solidFill>
+              <a:latin typeface="微软雅黑" panose="020B0503020204020204" charset="-122"/>
+            </a:endParaRPr>
           </a:p>
         </p:txBody>
       </p:sp>
@@ -9372,7 +9963,7 @@
           <a:noFill/>
         </p:spPr>
         <p:txBody>
-          <a:bodyPr wrap="square" anchor="t" lIns="0" rIns="0" tIns="0" bIns="0">
+          <a:bodyPr wrap="square" lIns="0" tIns="0" rIns="0" bIns="0" anchor="t">
             <a:spAutoFit/>
           </a:bodyPr>
           <a:lstStyle/>
@@ -9393,10 +9984,16 @@
                 <a:solidFill>
                   <a:srgbClr val="10222B"/>
                 </a:solidFill>
-                <a:latin typeface="Microsoft YaHei"/>
+                <a:latin typeface="微软雅黑" panose="020B0503020204020204" charset="-122"/>
               </a:rPr>
               <a:t>5–6 人的小团队</a:t>
             </a:r>
+            <a:endParaRPr sz="3100" b="1">
+              <a:solidFill>
+                <a:srgbClr val="10222B"/>
+              </a:solidFill>
+              <a:latin typeface="微软雅黑" panose="020B0503020204020204" charset="-122"/>
+            </a:endParaRPr>
           </a:p>
         </p:txBody>
       </p:sp>
@@ -9485,7 +10082,7 @@
           </a:fontRef>
         </p:style>
         <p:txBody>
-          <a:bodyPr rtlCol="0" anchor="ctr" wrap="square" lIns="54864" rIns="54864" tIns="27432" bIns="27432"/>
+          <a:bodyPr wrap="square" lIns="54864" tIns="27432" rIns="54864" bIns="27432" rtlCol="0" anchor="ctr"/>
           <a:lstStyle/>
           <a:p>
             <a:pPr algn="ctr">
@@ -9498,10 +10095,16 @@
                 <a:solidFill>
                   <a:srgbClr val="0D6B5C"/>
                 </a:solidFill>
-                <a:latin typeface="Microsoft YaHei"/>
+                <a:latin typeface="微软雅黑" panose="020B0503020204020204" charset="-122"/>
               </a:rPr>
               <a:t>× 1</a:t>
             </a:r>
+            <a:endParaRPr sz="1500" b="1">
+              <a:solidFill>
+                <a:srgbClr val="0D6B5C"/>
+              </a:solidFill>
+              <a:latin typeface="微软雅黑" panose="020B0503020204020204" charset="-122"/>
+            </a:endParaRPr>
           </a:p>
         </p:txBody>
       </p:sp>
@@ -9522,7 +10125,7 @@
           <a:noFill/>
         </p:spPr>
         <p:txBody>
-          <a:bodyPr wrap="square" anchor="t" lIns="0" rIns="0" tIns="0" bIns="0">
+          <a:bodyPr wrap="square" lIns="0" tIns="0" rIns="0" bIns="0" anchor="t">
             <a:spAutoFit/>
           </a:bodyPr>
           <a:lstStyle/>
@@ -9543,10 +10146,16 @@
                 <a:solidFill>
                   <a:srgbClr val="10222B"/>
                 </a:solidFill>
-                <a:latin typeface="Microsoft YaHei"/>
+                <a:latin typeface="微软雅黑" panose="020B0503020204020204" charset="-122"/>
               </a:rPr>
               <a:t>产品</a:t>
             </a:r>
+            <a:endParaRPr sz="1700" b="1">
+              <a:solidFill>
+                <a:srgbClr val="10222B"/>
+              </a:solidFill>
+              <a:latin typeface="微软雅黑" panose="020B0503020204020204" charset="-122"/>
+            </a:endParaRPr>
           </a:p>
         </p:txBody>
       </p:sp>
@@ -9567,7 +10176,7 @@
           <a:noFill/>
         </p:spPr>
         <p:txBody>
-          <a:bodyPr wrap="square" anchor="t" lIns="0" rIns="0" tIns="0" bIns="0">
+          <a:bodyPr wrap="square" lIns="0" tIns="0" rIns="0" bIns="0" anchor="t">
             <a:spAutoFit/>
           </a:bodyPr>
           <a:lstStyle/>
@@ -9588,10 +10197,16 @@
                 <a:solidFill>
                   <a:srgbClr val="4A5B64"/>
                 </a:solidFill>
-                <a:latin typeface="Microsoft YaHei"/>
+                <a:latin typeface="微软雅黑" panose="020B0503020204020204" charset="-122"/>
               </a:rPr>
               <a:t>Product</a:t>
             </a:r>
+            <a:endParaRPr sz="1150" b="0">
+              <a:solidFill>
+                <a:srgbClr val="4A5B64"/>
+              </a:solidFill>
+              <a:latin typeface="微软雅黑" panose="020B0503020204020204" charset="-122"/>
+            </a:endParaRPr>
           </a:p>
         </p:txBody>
       </p:sp>
@@ -9680,7 +10295,7 @@
           </a:fontRef>
         </p:style>
         <p:txBody>
-          <a:bodyPr rtlCol="0" anchor="ctr" wrap="square" lIns="54864" rIns="54864" tIns="27432" bIns="27432"/>
+          <a:bodyPr wrap="square" lIns="54864" tIns="27432" rIns="54864" bIns="27432" rtlCol="0" anchor="ctr"/>
           <a:lstStyle/>
           <a:p>
             <a:pPr algn="ctr">
@@ -9693,10 +10308,16 @@
                 <a:solidFill>
                   <a:srgbClr val="0D6B5C"/>
                 </a:solidFill>
-                <a:latin typeface="Microsoft YaHei"/>
+                <a:latin typeface="微软雅黑" panose="020B0503020204020204" charset="-122"/>
               </a:rPr>
               <a:t>× 1–2</a:t>
             </a:r>
+            <a:endParaRPr sz="1500" b="1">
+              <a:solidFill>
+                <a:srgbClr val="0D6B5C"/>
+              </a:solidFill>
+              <a:latin typeface="微软雅黑" panose="020B0503020204020204" charset="-122"/>
+            </a:endParaRPr>
           </a:p>
         </p:txBody>
       </p:sp>
@@ -9717,7 +10338,7 @@
           <a:noFill/>
         </p:spPr>
         <p:txBody>
-          <a:bodyPr wrap="square" anchor="t" lIns="0" rIns="0" tIns="0" bIns="0">
+          <a:bodyPr wrap="square" lIns="0" tIns="0" rIns="0" bIns="0" anchor="t">
             <a:spAutoFit/>
           </a:bodyPr>
           <a:lstStyle/>
@@ -9738,10 +10359,16 @@
                 <a:solidFill>
                   <a:srgbClr val="10222B"/>
                 </a:solidFill>
-                <a:latin typeface="Microsoft YaHei"/>
+                <a:latin typeface="微软雅黑" panose="020B0503020204020204" charset="-122"/>
               </a:rPr>
               <a:t>AI</a:t>
             </a:r>
+            <a:endParaRPr sz="1700" b="1">
+              <a:solidFill>
+                <a:srgbClr val="10222B"/>
+              </a:solidFill>
+              <a:latin typeface="微软雅黑" panose="020B0503020204020204" charset="-122"/>
+            </a:endParaRPr>
           </a:p>
         </p:txBody>
       </p:sp>
@@ -9762,7 +10389,7 @@
           <a:noFill/>
         </p:spPr>
         <p:txBody>
-          <a:bodyPr wrap="square" anchor="t" lIns="0" rIns="0" tIns="0" bIns="0">
+          <a:bodyPr wrap="square" lIns="0" tIns="0" rIns="0" bIns="0" anchor="t">
             <a:spAutoFit/>
           </a:bodyPr>
           <a:lstStyle/>
@@ -9783,10 +10410,16 @@
                 <a:solidFill>
                   <a:srgbClr val="4A5B64"/>
                 </a:solidFill>
-                <a:latin typeface="Microsoft YaHei"/>
+                <a:latin typeface="微软雅黑" panose="020B0503020204020204" charset="-122"/>
               </a:rPr>
               <a:t>AI / LLM</a:t>
             </a:r>
+            <a:endParaRPr sz="1150" b="0">
+              <a:solidFill>
+                <a:srgbClr val="4A5B64"/>
+              </a:solidFill>
+              <a:latin typeface="微软雅黑" panose="020B0503020204020204" charset="-122"/>
+            </a:endParaRPr>
           </a:p>
         </p:txBody>
       </p:sp>
@@ -9875,7 +10508,7 @@
           </a:fontRef>
         </p:style>
         <p:txBody>
-          <a:bodyPr rtlCol="0" anchor="ctr" wrap="square" lIns="54864" rIns="54864" tIns="27432" bIns="27432"/>
+          <a:bodyPr wrap="square" lIns="54864" tIns="27432" rIns="54864" bIns="27432" rtlCol="0" anchor="ctr"/>
           <a:lstStyle/>
           <a:p>
             <a:pPr algn="ctr">
@@ -9888,10 +10521,16 @@
                 <a:solidFill>
                   <a:srgbClr val="0D6B5C"/>
                 </a:solidFill>
-                <a:latin typeface="Microsoft YaHei"/>
+                <a:latin typeface="微软雅黑" panose="020B0503020204020204" charset="-122"/>
               </a:rPr>
               <a:t>× 1</a:t>
             </a:r>
+            <a:endParaRPr sz="1500" b="1">
+              <a:solidFill>
+                <a:srgbClr val="0D6B5C"/>
+              </a:solidFill>
+              <a:latin typeface="微软雅黑" panose="020B0503020204020204" charset="-122"/>
+            </a:endParaRPr>
           </a:p>
         </p:txBody>
       </p:sp>
@@ -9912,7 +10551,7 @@
           <a:noFill/>
         </p:spPr>
         <p:txBody>
-          <a:bodyPr wrap="square" anchor="t" lIns="0" rIns="0" tIns="0" bIns="0">
+          <a:bodyPr wrap="square" lIns="0" tIns="0" rIns="0" bIns="0" anchor="t">
             <a:spAutoFit/>
           </a:bodyPr>
           <a:lstStyle/>
@@ -9933,10 +10572,16 @@
                 <a:solidFill>
                   <a:srgbClr val="10222B"/>
                 </a:solidFill>
-                <a:latin typeface="Microsoft YaHei"/>
+                <a:latin typeface="微软雅黑" panose="020B0503020204020204" charset="-122"/>
               </a:rPr>
               <a:t>全栈</a:t>
             </a:r>
+            <a:endParaRPr sz="1700" b="1">
+              <a:solidFill>
+                <a:srgbClr val="10222B"/>
+              </a:solidFill>
+              <a:latin typeface="微软雅黑" panose="020B0503020204020204" charset="-122"/>
+            </a:endParaRPr>
           </a:p>
         </p:txBody>
       </p:sp>
@@ -9957,7 +10602,7 @@
           <a:noFill/>
         </p:spPr>
         <p:txBody>
-          <a:bodyPr wrap="square" anchor="t" lIns="0" rIns="0" tIns="0" bIns="0">
+          <a:bodyPr wrap="square" lIns="0" tIns="0" rIns="0" bIns="0" anchor="t">
             <a:spAutoFit/>
           </a:bodyPr>
           <a:lstStyle/>
@@ -9978,10 +10623,16 @@
                 <a:solidFill>
                   <a:srgbClr val="4A5B64"/>
                 </a:solidFill>
-                <a:latin typeface="Microsoft YaHei"/>
+                <a:latin typeface="微软雅黑" panose="020B0503020204020204" charset="-122"/>
               </a:rPr>
               <a:t>Full-stack</a:t>
             </a:r>
+            <a:endParaRPr sz="1150" b="0">
+              <a:solidFill>
+                <a:srgbClr val="4A5B64"/>
+              </a:solidFill>
+              <a:latin typeface="微软雅黑" panose="020B0503020204020204" charset="-122"/>
+            </a:endParaRPr>
           </a:p>
         </p:txBody>
       </p:sp>
@@ -10070,7 +10721,7 @@
           </a:fontRef>
         </p:style>
         <p:txBody>
-          <a:bodyPr rtlCol="0" anchor="ctr" wrap="square" lIns="54864" rIns="54864" tIns="27432" bIns="27432"/>
+          <a:bodyPr wrap="square" lIns="54864" tIns="27432" rIns="54864" bIns="27432" rtlCol="0" anchor="ctr"/>
           <a:lstStyle/>
           <a:p>
             <a:pPr algn="ctr">
@@ -10083,10 +10734,16 @@
                 <a:solidFill>
                   <a:srgbClr val="0D6B5C"/>
                 </a:solidFill>
-                <a:latin typeface="Microsoft YaHei"/>
+                <a:latin typeface="微软雅黑" panose="020B0503020204020204" charset="-122"/>
               </a:rPr>
               <a:t>× 1</a:t>
             </a:r>
+            <a:endParaRPr sz="1500" b="1">
+              <a:solidFill>
+                <a:srgbClr val="0D6B5C"/>
+              </a:solidFill>
+              <a:latin typeface="微软雅黑" panose="020B0503020204020204" charset="-122"/>
+            </a:endParaRPr>
           </a:p>
         </p:txBody>
       </p:sp>
@@ -10107,7 +10764,7 @@
           <a:noFill/>
         </p:spPr>
         <p:txBody>
-          <a:bodyPr wrap="square" anchor="t" lIns="0" rIns="0" tIns="0" bIns="0">
+          <a:bodyPr wrap="square" lIns="0" tIns="0" rIns="0" bIns="0" anchor="t">
             <a:spAutoFit/>
           </a:bodyPr>
           <a:lstStyle/>
@@ -10128,10 +10785,16 @@
                 <a:solidFill>
                   <a:srgbClr val="10222B"/>
                 </a:solidFill>
-                <a:latin typeface="Microsoft YaHei"/>
+                <a:latin typeface="微软雅黑" panose="020B0503020204020204" charset="-122"/>
               </a:rPr>
               <a:t>医学</a:t>
             </a:r>
+            <a:endParaRPr sz="1700" b="1">
+              <a:solidFill>
+                <a:srgbClr val="10222B"/>
+              </a:solidFill>
+              <a:latin typeface="微软雅黑" panose="020B0503020204020204" charset="-122"/>
+            </a:endParaRPr>
           </a:p>
         </p:txBody>
       </p:sp>
@@ -10152,7 +10815,7 @@
           <a:noFill/>
         </p:spPr>
         <p:txBody>
-          <a:bodyPr wrap="square" anchor="t" lIns="0" rIns="0" tIns="0" bIns="0">
+          <a:bodyPr wrap="square" lIns="0" tIns="0" rIns="0" bIns="0" anchor="t">
             <a:spAutoFit/>
           </a:bodyPr>
           <a:lstStyle/>
@@ -10173,10 +10836,16 @@
                 <a:solidFill>
                   <a:srgbClr val="4A5B64"/>
                 </a:solidFill>
-                <a:latin typeface="Microsoft YaHei"/>
+                <a:latin typeface="微软雅黑" panose="020B0503020204020204" charset="-122"/>
               </a:rPr>
               <a:t>Medical</a:t>
             </a:r>
+            <a:endParaRPr sz="1150" b="0">
+              <a:solidFill>
+                <a:srgbClr val="4A5B64"/>
+              </a:solidFill>
+              <a:latin typeface="微软雅黑" panose="020B0503020204020204" charset="-122"/>
+            </a:endParaRPr>
           </a:p>
         </p:txBody>
       </p:sp>
@@ -10265,7 +10934,7 @@
           </a:fontRef>
         </p:style>
         <p:txBody>
-          <a:bodyPr rtlCol="0" anchor="ctr" wrap="square" lIns="54864" rIns="54864" tIns="27432" bIns="27432"/>
+          <a:bodyPr wrap="square" lIns="54864" tIns="27432" rIns="54864" bIns="27432" rtlCol="0" anchor="ctr"/>
           <a:lstStyle/>
           <a:p>
             <a:pPr algn="ctr">
@@ -10278,10 +10947,16 @@
                 <a:solidFill>
                   <a:srgbClr val="0D6B5C"/>
                 </a:solidFill>
-                <a:latin typeface="Microsoft YaHei"/>
+                <a:latin typeface="微软雅黑" panose="020B0503020204020204" charset="-122"/>
               </a:rPr>
               <a:t>× 1</a:t>
             </a:r>
+            <a:endParaRPr sz="1500" b="1">
+              <a:solidFill>
+                <a:srgbClr val="0D6B5C"/>
+              </a:solidFill>
+              <a:latin typeface="微软雅黑" panose="020B0503020204020204" charset="-122"/>
+            </a:endParaRPr>
           </a:p>
         </p:txBody>
       </p:sp>
@@ -10302,7 +10977,7 @@
           <a:noFill/>
         </p:spPr>
         <p:txBody>
-          <a:bodyPr wrap="square" anchor="t" lIns="0" rIns="0" tIns="0" bIns="0">
+          <a:bodyPr wrap="square" lIns="0" tIns="0" rIns="0" bIns="0" anchor="t">
             <a:spAutoFit/>
           </a:bodyPr>
           <a:lstStyle/>
@@ -10323,10 +10998,16 @@
                 <a:solidFill>
                   <a:srgbClr val="10222B"/>
                 </a:solidFill>
-                <a:latin typeface="Microsoft YaHei"/>
+                <a:latin typeface="微软雅黑" panose="020B0503020204020204" charset="-122"/>
               </a:rPr>
               <a:t>设计</a:t>
             </a:r>
+            <a:endParaRPr sz="1700" b="1">
+              <a:solidFill>
+                <a:srgbClr val="10222B"/>
+              </a:solidFill>
+              <a:latin typeface="微软雅黑" panose="020B0503020204020204" charset="-122"/>
+            </a:endParaRPr>
           </a:p>
         </p:txBody>
       </p:sp>
@@ -10347,7 +11028,7 @@
           <a:noFill/>
         </p:spPr>
         <p:txBody>
-          <a:bodyPr wrap="square" anchor="t" lIns="0" rIns="0" tIns="0" bIns="0">
+          <a:bodyPr wrap="square" lIns="0" tIns="0" rIns="0" bIns="0" anchor="t">
             <a:spAutoFit/>
           </a:bodyPr>
           <a:lstStyle/>
@@ -10368,10 +11049,16 @@
                 <a:solidFill>
                   <a:srgbClr val="4A5B64"/>
                 </a:solidFill>
-                <a:latin typeface="Microsoft YaHei"/>
+                <a:latin typeface="微软雅黑" panose="020B0503020204020204" charset="-122"/>
               </a:rPr>
               <a:t>Design</a:t>
             </a:r>
+            <a:endParaRPr sz="1150" b="0">
+              <a:solidFill>
+                <a:srgbClr val="4A5B64"/>
+              </a:solidFill>
+              <a:latin typeface="微软雅黑" panose="020B0503020204020204" charset="-122"/>
+            </a:endParaRPr>
           </a:p>
         </p:txBody>
       </p:sp>
@@ -10392,7 +11079,7 @@
           <a:noFill/>
         </p:spPr>
         <p:txBody>
-          <a:bodyPr wrap="square" anchor="t" lIns="0" rIns="0" tIns="0" bIns="0">
+          <a:bodyPr wrap="square" lIns="0" tIns="0" rIns="0" bIns="0" anchor="t">
             <a:spAutoFit/>
           </a:bodyPr>
           <a:lstStyle/>
@@ -10413,10 +11100,16 @@
                 <a:solidFill>
                   <a:srgbClr val="10222B"/>
                 </a:solidFill>
-                <a:latin typeface="Microsoft YaHei"/>
+                <a:latin typeface="微软雅黑" panose="020B0503020204020204" charset="-122"/>
               </a:rPr>
               <a:t>一个人扛不动一个产品；我们互补，一起把它跑起来。</a:t>
             </a:r>
+            <a:endParaRPr sz="1400" b="1">
+              <a:solidFill>
+                <a:srgbClr val="10222B"/>
+              </a:solidFill>
+              <a:latin typeface="微软雅黑" panose="020B0503020204020204" charset="-122"/>
+            </a:endParaRPr>
           </a:p>
         </p:txBody>
       </p:sp>
@@ -10437,7 +11130,7 @@
           <a:noFill/>
         </p:spPr>
         <p:txBody>
-          <a:bodyPr wrap="square" anchor="t" lIns="0" rIns="0" tIns="0" bIns="0">
+          <a:bodyPr wrap="square" lIns="0" tIns="0" rIns="0" bIns="0" anchor="t">
             <a:spAutoFit/>
           </a:bodyPr>
           <a:lstStyle/>
@@ -10458,10 +11151,16 @@
                 <a:solidFill>
                   <a:srgbClr val="8A99A2"/>
                 </a:solidFill>
-                <a:latin typeface="Microsoft YaHei"/>
+                <a:latin typeface="微软雅黑" panose="020B0503020204020204" charset="-122"/>
               </a:rPr>
               <a:t>AI Health Navigator · 团队招募</a:t>
             </a:r>
+            <a:endParaRPr sz="1000" b="0">
+              <a:solidFill>
+                <a:srgbClr val="8A99A2"/>
+              </a:solidFill>
+              <a:latin typeface="微软雅黑" panose="020B0503020204020204" charset="-122"/>
+            </a:endParaRPr>
           </a:p>
         </p:txBody>
       </p:sp>
@@ -10482,7 +11181,7 @@
           <a:noFill/>
         </p:spPr>
         <p:txBody>
-          <a:bodyPr wrap="square" anchor="t" lIns="0" rIns="0" tIns="0" bIns="0">
+          <a:bodyPr wrap="square" lIns="0" tIns="0" rIns="0" bIns="0" anchor="t">
             <a:spAutoFit/>
           </a:bodyPr>
           <a:lstStyle/>
@@ -10503,10 +11202,16 @@
                 <a:solidFill>
                   <a:srgbClr val="4A5B64"/>
                 </a:solidFill>
-                <a:latin typeface="Microsoft YaHei"/>
+                <a:latin typeface="微软雅黑" panose="020B0503020204020204" charset="-122"/>
               </a:rPr>
               <a:t>7</a:t>
             </a:r>
+            <a:endParaRPr sz="1100" b="1">
+              <a:solidFill>
+                <a:srgbClr val="4A5B64"/>
+              </a:solidFill>
+              <a:latin typeface="微软雅黑" panose="020B0503020204020204" charset="-122"/>
+            </a:endParaRPr>
           </a:p>
         </p:txBody>
       </p:sp>
@@ -10519,7 +11224,7 @@
 </file>
 
 <file path=ppt/slides/slide8.xml><?xml version="1.0" encoding="utf-8"?>
-<p:sld xmlns:a="http://schemas.openxmlformats.org/drawingml/2006/main" xmlns:p="http://schemas.openxmlformats.org/presentationml/2006/main" xmlns:r="http://schemas.openxmlformats.org/officeDocument/2006/relationships">
+<p:sld xmlns:a="http://schemas.openxmlformats.org/drawingml/2006/main" xmlns:r="http://schemas.openxmlformats.org/officeDocument/2006/relationships" xmlns:p="http://schemas.openxmlformats.org/presentationml/2006/main">
   <p:cSld>
     <p:bg>
       <p:bgPr>
@@ -10597,7 +11302,7 @@
           <a:noFill/>
         </p:spPr>
         <p:txBody>
-          <a:bodyPr wrap="square" anchor="t" lIns="0" rIns="0" tIns="0" bIns="0">
+          <a:bodyPr wrap="square" lIns="0" tIns="0" rIns="0" bIns="0" anchor="t">
             <a:spAutoFit/>
           </a:bodyPr>
           <a:lstStyle/>
@@ -10618,10 +11323,16 @@
                 <a:solidFill>
                   <a:srgbClr val="0D6B5C"/>
                 </a:solidFill>
-                <a:latin typeface="Microsoft YaHei"/>
+                <a:latin typeface="微软雅黑" panose="020B0503020204020204" charset="-122"/>
               </a:rPr>
               <a:t>07 · 你会做什么</a:t>
             </a:r>
+            <a:endParaRPr sz="1300" b="1">
+              <a:solidFill>
+                <a:srgbClr val="0D6B5C"/>
+              </a:solidFill>
+              <a:latin typeface="微软雅黑" panose="020B0503020204020204" charset="-122"/>
+            </a:endParaRPr>
           </a:p>
         </p:txBody>
       </p:sp>
@@ -10642,7 +11353,7 @@
           <a:noFill/>
         </p:spPr>
         <p:txBody>
-          <a:bodyPr wrap="square" anchor="t" lIns="0" rIns="0" tIns="0" bIns="0">
+          <a:bodyPr wrap="square" lIns="0" tIns="0" rIns="0" bIns="0" anchor="t">
             <a:spAutoFit/>
           </a:bodyPr>
           <a:lstStyle/>
@@ -10663,10 +11374,16 @@
                 <a:solidFill>
                   <a:srgbClr val="10222B"/>
                 </a:solidFill>
-                <a:latin typeface="Microsoft YaHei"/>
+                <a:latin typeface="微软雅黑" panose="020B0503020204020204" charset="-122"/>
               </a:rPr>
               <a:t>不是查资料 + 做 PPT</a:t>
             </a:r>
+            <a:endParaRPr sz="3100" b="1">
+              <a:solidFill>
+                <a:srgbClr val="10222B"/>
+              </a:solidFill>
+              <a:latin typeface="微软雅黑" panose="020B0503020204020204" charset="-122"/>
+            </a:endParaRPr>
           </a:p>
         </p:txBody>
       </p:sp>
@@ -10687,7 +11404,7 @@
           <a:noFill/>
         </p:spPr>
         <p:txBody>
-          <a:bodyPr wrap="square" anchor="t" lIns="0" rIns="0" tIns="0" bIns="0">
+          <a:bodyPr wrap="square" lIns="0" tIns="0" rIns="0" bIns="0" anchor="t">
             <a:spAutoFit/>
           </a:bodyPr>
           <a:lstStyle/>
@@ -10708,10 +11425,16 @@
                 <a:solidFill>
                   <a:srgbClr val="10222B"/>
                 </a:solidFill>
-                <a:latin typeface="Microsoft YaHei"/>
+                <a:latin typeface="微软雅黑" panose="020B0503020204020204" charset="-122"/>
               </a:rPr>
               <a:t>从第一天起，就参与真实的判断与执行：</a:t>
             </a:r>
+            <a:endParaRPr sz="1700" b="1">
+              <a:solidFill>
+                <a:srgbClr val="10222B"/>
+              </a:solidFill>
+              <a:latin typeface="微软雅黑" panose="020B0503020204020204" charset="-122"/>
+            </a:endParaRPr>
           </a:p>
         </p:txBody>
       </p:sp>
@@ -10756,7 +11479,7 @@
           </a:fontRef>
         </p:style>
         <p:txBody>
-          <a:bodyPr rtlCol="0" anchor="ctr" wrap="square" lIns="54864" rIns="54864" tIns="27432" bIns="27432"/>
+          <a:bodyPr wrap="square" lIns="54864" tIns="27432" rIns="54864" bIns="27432" rtlCol="0" anchor="ctr"/>
           <a:lstStyle/>
           <a:p>
             <a:pPr algn="ctr">
@@ -10769,10 +11492,16 @@
                 <a:solidFill>
                   <a:srgbClr val="0D6B5C"/>
                 </a:solidFill>
-                <a:latin typeface="Microsoft YaHei"/>
+                <a:latin typeface="微软雅黑" panose="020B0503020204020204" charset="-122"/>
               </a:rPr>
               <a:t>用户访谈</a:t>
             </a:r>
+            <a:endParaRPr sz="1400" b="1">
+              <a:solidFill>
+                <a:srgbClr val="0D6B5C"/>
+              </a:solidFill>
+              <a:latin typeface="微软雅黑" panose="020B0503020204020204" charset="-122"/>
+            </a:endParaRPr>
           </a:p>
         </p:txBody>
       </p:sp>
@@ -10793,7 +11522,7 @@
           <a:noFill/>
         </p:spPr>
         <p:txBody>
-          <a:bodyPr wrap="square" anchor="ctr" lIns="0" rIns="0" tIns="0" bIns="0">
+          <a:bodyPr wrap="square" lIns="0" tIns="0" rIns="0" bIns="0" anchor="ctr">
             <a:spAutoFit/>
           </a:bodyPr>
           <a:lstStyle/>
@@ -10814,10 +11543,16 @@
                 <a:solidFill>
                   <a:srgbClr val="4A5B64"/>
                 </a:solidFill>
-                <a:latin typeface="Microsoft YaHei"/>
+                <a:latin typeface="微软雅黑" panose="020B0503020204020204" charset="-122"/>
               </a:rPr>
               <a:t>→</a:t>
             </a:r>
+            <a:endParaRPr sz="1700" b="1">
+              <a:solidFill>
+                <a:srgbClr val="4A5B64"/>
+              </a:solidFill>
+              <a:latin typeface="微软雅黑" panose="020B0503020204020204" charset="-122"/>
+            </a:endParaRPr>
           </a:p>
         </p:txBody>
       </p:sp>
@@ -10862,7 +11597,7 @@
           </a:fontRef>
         </p:style>
         <p:txBody>
-          <a:bodyPr rtlCol="0" anchor="ctr" wrap="square" lIns="54864" rIns="54864" tIns="27432" bIns="27432"/>
+          <a:bodyPr wrap="square" lIns="54864" tIns="27432" rIns="54864" bIns="27432" rtlCol="0" anchor="ctr"/>
           <a:lstStyle/>
           <a:p>
             <a:pPr algn="ctr">
@@ -10875,10 +11610,16 @@
                 <a:solidFill>
                   <a:srgbClr val="0D6B5C"/>
                 </a:solidFill>
-                <a:latin typeface="Microsoft YaHei"/>
+                <a:latin typeface="微软雅黑" panose="020B0503020204020204" charset="-122"/>
               </a:rPr>
               <a:t>快速迭代</a:t>
             </a:r>
+            <a:endParaRPr sz="1400" b="1">
+              <a:solidFill>
+                <a:srgbClr val="0D6B5C"/>
+              </a:solidFill>
+              <a:latin typeface="微软雅黑" panose="020B0503020204020204" charset="-122"/>
+            </a:endParaRPr>
           </a:p>
         </p:txBody>
       </p:sp>
@@ -10899,7 +11640,7 @@
           <a:noFill/>
         </p:spPr>
         <p:txBody>
-          <a:bodyPr wrap="square" anchor="ctr" lIns="0" rIns="0" tIns="0" bIns="0">
+          <a:bodyPr wrap="square" lIns="0" tIns="0" rIns="0" bIns="0" anchor="ctr">
             <a:spAutoFit/>
           </a:bodyPr>
           <a:lstStyle/>
@@ -10920,10 +11661,16 @@
                 <a:solidFill>
                   <a:srgbClr val="4A5B64"/>
                 </a:solidFill>
-                <a:latin typeface="Microsoft YaHei"/>
+                <a:latin typeface="微软雅黑" panose="020B0503020204020204" charset="-122"/>
               </a:rPr>
               <a:t>→</a:t>
             </a:r>
+            <a:endParaRPr sz="1700" b="1">
+              <a:solidFill>
+                <a:srgbClr val="4A5B64"/>
+              </a:solidFill>
+              <a:latin typeface="微软雅黑" panose="020B0503020204020204" charset="-122"/>
+            </a:endParaRPr>
           </a:p>
         </p:txBody>
       </p:sp>
@@ -10968,7 +11715,7 @@
           </a:fontRef>
         </p:style>
         <p:txBody>
-          <a:bodyPr rtlCol="0" anchor="ctr" wrap="square" lIns="54864" rIns="54864" tIns="27432" bIns="27432"/>
+          <a:bodyPr wrap="square" lIns="54864" tIns="27432" rIns="54864" bIns="27432" rtlCol="0" anchor="ctr"/>
           <a:lstStyle/>
           <a:p>
             <a:pPr algn="ctr">
@@ -10981,10 +11728,16 @@
                 <a:solidFill>
                   <a:srgbClr val="0D6B5C"/>
                 </a:solidFill>
-                <a:latin typeface="Microsoft YaHei"/>
+                <a:latin typeface="微软雅黑" panose="020B0503020204020204" charset="-122"/>
               </a:rPr>
               <a:t>Demo</a:t>
             </a:r>
+            <a:endParaRPr sz="1400" b="1">
+              <a:solidFill>
+                <a:srgbClr val="0D6B5C"/>
+              </a:solidFill>
+              <a:latin typeface="微软雅黑" panose="020B0503020204020204" charset="-122"/>
+            </a:endParaRPr>
           </a:p>
         </p:txBody>
       </p:sp>
@@ -11005,7 +11758,7 @@
           <a:noFill/>
         </p:spPr>
         <p:txBody>
-          <a:bodyPr wrap="square" anchor="ctr" lIns="0" rIns="0" tIns="0" bIns="0">
+          <a:bodyPr wrap="square" lIns="0" tIns="0" rIns="0" bIns="0" anchor="ctr">
             <a:spAutoFit/>
           </a:bodyPr>
           <a:lstStyle/>
@@ -11026,10 +11779,16 @@
                 <a:solidFill>
                   <a:srgbClr val="4A5B64"/>
                 </a:solidFill>
-                <a:latin typeface="Microsoft YaHei"/>
+                <a:latin typeface="微软雅黑" panose="020B0503020204020204" charset="-122"/>
               </a:rPr>
               <a:t>→</a:t>
             </a:r>
+            <a:endParaRPr sz="1700" b="1">
+              <a:solidFill>
+                <a:srgbClr val="4A5B64"/>
+              </a:solidFill>
+              <a:latin typeface="微软雅黑" panose="020B0503020204020204" charset="-122"/>
+            </a:endParaRPr>
           </a:p>
         </p:txBody>
       </p:sp>
@@ -11074,7 +11833,7 @@
           </a:fontRef>
         </p:style>
         <p:txBody>
-          <a:bodyPr rtlCol="0" anchor="ctr" wrap="square" lIns="54864" rIns="54864" tIns="27432" bIns="27432"/>
+          <a:bodyPr wrap="square" lIns="54864" tIns="27432" rIns="54864" bIns="27432" rtlCol="0" anchor="ctr"/>
           <a:lstStyle/>
           <a:p>
             <a:pPr algn="ctr">
@@ -11087,10 +11846,16 @@
                 <a:solidFill>
                   <a:srgbClr val="0D6B5C"/>
                 </a:solidFill>
-                <a:latin typeface="Microsoft YaHei"/>
+                <a:latin typeface="微软雅黑" panose="020B0503020204020204" charset="-122"/>
               </a:rPr>
               <a:t>MVP</a:t>
             </a:r>
+            <a:endParaRPr sz="1400" b="1">
+              <a:solidFill>
+                <a:srgbClr val="0D6B5C"/>
+              </a:solidFill>
+              <a:latin typeface="微软雅黑" panose="020B0503020204020204" charset="-122"/>
+            </a:endParaRPr>
           </a:p>
         </p:txBody>
       </p:sp>
@@ -11111,7 +11876,7 @@
           <a:noFill/>
         </p:spPr>
         <p:txBody>
-          <a:bodyPr wrap="square" anchor="ctr" lIns="0" rIns="0" tIns="0" bIns="0">
+          <a:bodyPr wrap="square" lIns="0" tIns="0" rIns="0" bIns="0" anchor="ctr">
             <a:spAutoFit/>
           </a:bodyPr>
           <a:lstStyle/>
@@ -11132,10 +11897,16 @@
                 <a:solidFill>
                   <a:srgbClr val="4A5B64"/>
                 </a:solidFill>
-                <a:latin typeface="Microsoft YaHei"/>
+                <a:latin typeface="微软雅黑" panose="020B0503020204020204" charset="-122"/>
               </a:rPr>
               <a:t>→</a:t>
             </a:r>
+            <a:endParaRPr sz="1700" b="1">
+              <a:solidFill>
+                <a:srgbClr val="4A5B64"/>
+              </a:solidFill>
+              <a:latin typeface="微软雅黑" panose="020B0503020204020204" charset="-122"/>
+            </a:endParaRPr>
           </a:p>
         </p:txBody>
       </p:sp>
@@ -11180,7 +11951,7 @@
           </a:fontRef>
         </p:style>
         <p:txBody>
-          <a:bodyPr rtlCol="0" anchor="ctr" wrap="square" lIns="54864" rIns="54864" tIns="27432" bIns="27432"/>
+          <a:bodyPr wrap="square" lIns="54864" tIns="27432" rIns="54864" bIns="27432" rtlCol="0" anchor="ctr"/>
           <a:lstStyle/>
           <a:p>
             <a:pPr algn="ctr">
@@ -11193,10 +11964,16 @@
                 <a:solidFill>
                   <a:srgbClr val="0D6B5C"/>
                 </a:solidFill>
-                <a:latin typeface="Microsoft YaHei"/>
+                <a:latin typeface="微软雅黑" panose="020B0503020204020204" charset="-122"/>
               </a:rPr>
               <a:t>真实用户</a:t>
             </a:r>
+            <a:endParaRPr sz="1400" b="1">
+              <a:solidFill>
+                <a:srgbClr val="0D6B5C"/>
+              </a:solidFill>
+              <a:latin typeface="微软雅黑" panose="020B0503020204020204" charset="-122"/>
+            </a:endParaRPr>
           </a:p>
         </p:txBody>
       </p:sp>
@@ -11217,7 +11994,7 @@
           <a:noFill/>
         </p:spPr>
         <p:txBody>
-          <a:bodyPr wrap="square" anchor="ctr" lIns="0" rIns="0" tIns="0" bIns="0">
+          <a:bodyPr wrap="square" lIns="0" tIns="0" rIns="0" bIns="0" anchor="ctr">
             <a:spAutoFit/>
           </a:bodyPr>
           <a:lstStyle/>
@@ -11238,10 +12015,16 @@
                 <a:solidFill>
                   <a:srgbClr val="4A5B64"/>
                 </a:solidFill>
-                <a:latin typeface="Microsoft YaHei"/>
+                <a:latin typeface="微软雅黑" panose="020B0503020204020204" charset="-122"/>
               </a:rPr>
               <a:t>→</a:t>
             </a:r>
+            <a:endParaRPr sz="1700" b="1">
+              <a:solidFill>
+                <a:srgbClr val="4A5B64"/>
+              </a:solidFill>
+              <a:latin typeface="微软雅黑" panose="020B0503020204020204" charset="-122"/>
+            </a:endParaRPr>
           </a:p>
         </p:txBody>
       </p:sp>
@@ -11286,7 +12069,7 @@
           </a:fontRef>
         </p:style>
         <p:txBody>
-          <a:bodyPr rtlCol="0" anchor="ctr" wrap="square" lIns="54864" rIns="54864" tIns="27432" bIns="27432"/>
+          <a:bodyPr wrap="square" lIns="54864" tIns="27432" rIns="54864" bIns="27432" rtlCol="0" anchor="ctr"/>
           <a:lstStyle/>
           <a:p>
             <a:pPr algn="ctr">
@@ -11299,10 +12082,16 @@
                 <a:solidFill>
                   <a:srgbClr val="0D6B5C"/>
                 </a:solidFill>
-                <a:latin typeface="Microsoft YaHei"/>
+                <a:latin typeface="微软雅黑" panose="020B0503020204020204" charset="-122"/>
               </a:rPr>
               <a:t>验证假设</a:t>
             </a:r>
+            <a:endParaRPr sz="1400" b="1">
+              <a:solidFill>
+                <a:srgbClr val="0D6B5C"/>
+              </a:solidFill>
+              <a:latin typeface="微软雅黑" panose="020B0503020204020204" charset="-122"/>
+            </a:endParaRPr>
           </a:p>
         </p:txBody>
       </p:sp>
@@ -11323,7 +12112,7 @@
           <a:noFill/>
         </p:spPr>
         <p:txBody>
-          <a:bodyPr wrap="square" anchor="t" lIns="0" rIns="0" tIns="0" bIns="0">
+          <a:bodyPr wrap="square" lIns="0" tIns="0" rIns="0" bIns="0" anchor="t">
             <a:spAutoFit/>
           </a:bodyPr>
           <a:lstStyle/>
@@ -11344,10 +12133,16 @@
                 <a:solidFill>
                   <a:srgbClr val="4A5B64"/>
                 </a:solidFill>
-                <a:latin typeface="Microsoft YaHei"/>
+                <a:latin typeface="微软雅黑" panose="020B0503020204020204" charset="-122"/>
               </a:rPr>
               <a:t>每个阶段都动手：写代码 / 做访谈 / 画原型 / 看数据，而不是旁观。</a:t>
             </a:r>
+            <a:endParaRPr sz="1500" b="0">
+              <a:solidFill>
+                <a:srgbClr val="4A5B64"/>
+              </a:solidFill>
+              <a:latin typeface="微软雅黑" panose="020B0503020204020204" charset="-122"/>
+            </a:endParaRPr>
           </a:p>
           <a:p>
             <a:pPr algn="l">
@@ -11366,10 +12161,16 @@
                 <a:solidFill>
                   <a:srgbClr val="0D6B5C"/>
                 </a:solidFill>
-                <a:latin typeface="Microsoft YaHei"/>
+                <a:latin typeface="微软雅黑" panose="020B0503020204020204" charset="-122"/>
               </a:rPr>
               <a:t>Demo → MVP → 真实用户 → 验证假设</a:t>
             </a:r>
+            <a:endParaRPr sz="1600" b="1">
+              <a:solidFill>
+                <a:srgbClr val="0D6B5C"/>
+              </a:solidFill>
+              <a:latin typeface="微软雅黑" panose="020B0503020204020204" charset="-122"/>
+            </a:endParaRPr>
           </a:p>
         </p:txBody>
       </p:sp>
@@ -11390,7 +12191,7 @@
           <a:noFill/>
         </p:spPr>
         <p:txBody>
-          <a:bodyPr wrap="square" anchor="t" lIns="0" rIns="0" tIns="0" bIns="0">
+          <a:bodyPr wrap="square" lIns="0" tIns="0" rIns="0" bIns="0" anchor="t">
             <a:spAutoFit/>
           </a:bodyPr>
           <a:lstStyle/>
@@ -11411,10 +12212,16 @@
                 <a:solidFill>
                   <a:srgbClr val="8A99A2"/>
                 </a:solidFill>
-                <a:latin typeface="Microsoft YaHei"/>
+                <a:latin typeface="微软雅黑" panose="020B0503020204020204" charset="-122"/>
               </a:rPr>
               <a:t>AI Health Navigator · 团队招募</a:t>
             </a:r>
+            <a:endParaRPr sz="1000" b="0">
+              <a:solidFill>
+                <a:srgbClr val="8A99A2"/>
+              </a:solidFill>
+              <a:latin typeface="微软雅黑" panose="020B0503020204020204" charset="-122"/>
+            </a:endParaRPr>
           </a:p>
         </p:txBody>
       </p:sp>
@@ -11435,7 +12242,7 @@
           <a:noFill/>
         </p:spPr>
         <p:txBody>
-          <a:bodyPr wrap="square" anchor="t" lIns="0" rIns="0" tIns="0" bIns="0">
+          <a:bodyPr wrap="square" lIns="0" tIns="0" rIns="0" bIns="0" anchor="t">
             <a:spAutoFit/>
           </a:bodyPr>
           <a:lstStyle/>
@@ -11456,10 +12263,16 @@
                 <a:solidFill>
                   <a:srgbClr val="4A5B64"/>
                 </a:solidFill>
-                <a:latin typeface="Microsoft YaHei"/>
+                <a:latin typeface="微软雅黑" panose="020B0503020204020204" charset="-122"/>
               </a:rPr>
               <a:t>8</a:t>
             </a:r>
+            <a:endParaRPr sz="1100" b="1">
+              <a:solidFill>
+                <a:srgbClr val="4A5B64"/>
+              </a:solidFill>
+              <a:latin typeface="微软雅黑" panose="020B0503020204020204" charset="-122"/>
+            </a:endParaRPr>
           </a:p>
         </p:txBody>
       </p:sp>
@@ -11472,7 +12285,7 @@
 </file>
 
 <file path=ppt/slides/slide9.xml><?xml version="1.0" encoding="utf-8"?>
-<p:sld xmlns:a="http://schemas.openxmlformats.org/drawingml/2006/main" xmlns:p="http://schemas.openxmlformats.org/presentationml/2006/main" xmlns:r="http://schemas.openxmlformats.org/officeDocument/2006/relationships">
+<p:sld xmlns:a="http://schemas.openxmlformats.org/drawingml/2006/main" xmlns:r="http://schemas.openxmlformats.org/officeDocument/2006/relationships" xmlns:p="http://schemas.openxmlformats.org/presentationml/2006/main">
   <p:cSld>
     <p:bg>
       <p:bgPr>
@@ -11550,7 +12363,7 @@
           <a:noFill/>
         </p:spPr>
         <p:txBody>
-          <a:bodyPr wrap="square" anchor="t" lIns="0" rIns="0" tIns="0" bIns="0">
+          <a:bodyPr wrap="square" lIns="0" tIns="0" rIns="0" bIns="0" anchor="t">
             <a:spAutoFit/>
           </a:bodyPr>
           <a:lstStyle/>
@@ -11571,10 +12384,16 @@
                 <a:solidFill>
                   <a:srgbClr val="0D6B5C"/>
                 </a:solidFill>
-                <a:latin typeface="Microsoft YaHei"/>
+                <a:latin typeface="微软雅黑" panose="020B0503020204020204" charset="-122"/>
               </a:rPr>
               <a:t>08 · 队友</a:t>
             </a:r>
+            <a:endParaRPr sz="1300" b="1">
+              <a:solidFill>
+                <a:srgbClr val="0D6B5C"/>
+              </a:solidFill>
+              <a:latin typeface="微软雅黑" panose="020B0503020204020204" charset="-122"/>
+            </a:endParaRPr>
           </a:p>
         </p:txBody>
       </p:sp>
@@ -11595,7 +12414,7 @@
           <a:noFill/>
         </p:spPr>
         <p:txBody>
-          <a:bodyPr wrap="square" anchor="t" lIns="0" rIns="0" tIns="0" bIns="0">
+          <a:bodyPr wrap="square" lIns="0" tIns="0" rIns="0" bIns="0" anchor="t">
             <a:spAutoFit/>
           </a:bodyPr>
           <a:lstStyle/>
@@ -11616,10 +12435,16 @@
                 <a:solidFill>
                   <a:srgbClr val="10222B"/>
                 </a:solidFill>
-                <a:latin typeface="Microsoft YaHei"/>
+                <a:latin typeface="微软雅黑" panose="020B0503020204020204" charset="-122"/>
               </a:rPr>
               <a:t>我们希望你是这样的人</a:t>
             </a:r>
+            <a:endParaRPr sz="3100" b="1">
+              <a:solidFill>
+                <a:srgbClr val="10222B"/>
+              </a:solidFill>
+              <a:latin typeface="微软雅黑" panose="020B0503020204020204" charset="-122"/>
+            </a:endParaRPr>
           </a:p>
         </p:txBody>
       </p:sp>
@@ -11688,7 +12513,7 @@
           <a:noFill/>
         </p:spPr>
         <p:txBody>
-          <a:bodyPr wrap="square" anchor="t" lIns="0" rIns="0" tIns="0" bIns="0">
+          <a:bodyPr wrap="square" lIns="0" tIns="0" rIns="0" bIns="0" anchor="t">
             <a:spAutoFit/>
           </a:bodyPr>
           <a:lstStyle/>
@@ -11709,10 +12534,16 @@
                 <a:solidFill>
                   <a:srgbClr val="0D6B5C"/>
                 </a:solidFill>
-                <a:latin typeface="Microsoft YaHei"/>
+                <a:latin typeface="微软雅黑" panose="020B0503020204020204" charset="-122"/>
               </a:rPr>
               <a:t>Builder mindset</a:t>
             </a:r>
+            <a:endParaRPr sz="1500" b="1">
+              <a:solidFill>
+                <a:srgbClr val="0D6B5C"/>
+              </a:solidFill>
+              <a:latin typeface="微软雅黑" panose="020B0503020204020204" charset="-122"/>
+            </a:endParaRPr>
           </a:p>
         </p:txBody>
       </p:sp>
@@ -11733,7 +12564,7 @@
           <a:noFill/>
         </p:spPr>
         <p:txBody>
-          <a:bodyPr wrap="square" anchor="t" lIns="0" rIns="0" tIns="0" bIns="0">
+          <a:bodyPr wrap="square" lIns="0" tIns="0" rIns="0" bIns="0" anchor="t">
             <a:spAutoFit/>
           </a:bodyPr>
           <a:lstStyle/>
@@ -11754,10 +12585,16 @@
                 <a:solidFill>
                   <a:srgbClr val="4A5B64"/>
                 </a:solidFill>
-                <a:latin typeface="Microsoft YaHei"/>
+                <a:latin typeface="微软雅黑" panose="020B0503020204020204" charset="-122"/>
               </a:rPr>
               <a:t>动手造，而不是只讨论</a:t>
             </a:r>
+            <a:endParaRPr sz="1400" b="0">
+              <a:solidFill>
+                <a:srgbClr val="4A5B64"/>
+              </a:solidFill>
+              <a:latin typeface="微软雅黑" panose="020B0503020204020204" charset="-122"/>
+            </a:endParaRPr>
           </a:p>
         </p:txBody>
       </p:sp>
@@ -11826,7 +12663,7 @@
           <a:noFill/>
         </p:spPr>
         <p:txBody>
-          <a:bodyPr wrap="square" anchor="t" lIns="0" rIns="0" tIns="0" bIns="0">
+          <a:bodyPr wrap="square" lIns="0" tIns="0" rIns="0" bIns="0" anchor="t">
             <a:spAutoFit/>
           </a:bodyPr>
           <a:lstStyle/>
@@ -11847,10 +12684,16 @@
                 <a:solidFill>
                   <a:srgbClr val="0D6B5C"/>
                 </a:solidFill>
-                <a:latin typeface="Microsoft YaHei"/>
+                <a:latin typeface="微软雅黑" panose="020B0503020204020204" charset="-122"/>
               </a:rPr>
               <a:t>Curiosity</a:t>
             </a:r>
+            <a:endParaRPr sz="1500" b="1">
+              <a:solidFill>
+                <a:srgbClr val="0D6B5C"/>
+              </a:solidFill>
+              <a:latin typeface="微软雅黑" panose="020B0503020204020204" charset="-122"/>
+            </a:endParaRPr>
           </a:p>
         </p:txBody>
       </p:sp>
@@ -11871,7 +12714,7 @@
           <a:noFill/>
         </p:spPr>
         <p:txBody>
-          <a:bodyPr wrap="square" anchor="t" lIns="0" rIns="0" tIns="0" bIns="0">
+          <a:bodyPr wrap="square" lIns="0" tIns="0" rIns="0" bIns="0" anchor="t">
             <a:spAutoFit/>
           </a:bodyPr>
           <a:lstStyle/>
@@ -11892,10 +12735,16 @@
                 <a:solidFill>
                   <a:srgbClr val="4A5B64"/>
                 </a:solidFill>
-                <a:latin typeface="Microsoft YaHei"/>
+                <a:latin typeface="微软雅黑" panose="020B0503020204020204" charset="-122"/>
               </a:rPr>
               <a:t>对「为什么」保持好奇</a:t>
             </a:r>
+            <a:endParaRPr sz="1400" b="0">
+              <a:solidFill>
+                <a:srgbClr val="4A5B64"/>
+              </a:solidFill>
+              <a:latin typeface="微软雅黑" panose="020B0503020204020204" charset="-122"/>
+            </a:endParaRPr>
           </a:p>
         </p:txBody>
       </p:sp>
@@ -11964,7 +12813,7 @@
           <a:noFill/>
         </p:spPr>
         <p:txBody>
-          <a:bodyPr wrap="square" anchor="t" lIns="0" rIns="0" tIns="0" bIns="0">
+          <a:bodyPr wrap="square" lIns="0" tIns="0" rIns="0" bIns="0" anchor="t">
             <a:spAutoFit/>
           </a:bodyPr>
           <a:lstStyle/>
@@ -11985,10 +12834,16 @@
                 <a:solidFill>
                   <a:srgbClr val="0D6B5C"/>
                 </a:solidFill>
-                <a:latin typeface="Microsoft YaHei"/>
+                <a:latin typeface="微软雅黑" panose="020B0503020204020204" charset="-122"/>
               </a:rPr>
               <a:t>Ownership</a:t>
             </a:r>
+            <a:endParaRPr sz="1500" b="1">
+              <a:solidFill>
+                <a:srgbClr val="0D6B5C"/>
+              </a:solidFill>
+              <a:latin typeface="微软雅黑" panose="020B0503020204020204" charset="-122"/>
+            </a:endParaRPr>
           </a:p>
         </p:txBody>
       </p:sp>
@@ -12009,7 +12864,7 @@
           <a:noFill/>
         </p:spPr>
         <p:txBody>
-          <a:bodyPr wrap="square" anchor="t" lIns="0" rIns="0" tIns="0" bIns="0">
+          <a:bodyPr wrap="square" lIns="0" tIns="0" rIns="0" bIns="0" anchor="t">
             <a:spAutoFit/>
           </a:bodyPr>
           <a:lstStyle/>
@@ -12030,10 +12885,16 @@
                 <a:solidFill>
                   <a:srgbClr val="4A5B64"/>
                 </a:solidFill>
-                <a:latin typeface="Microsoft YaHei"/>
+                <a:latin typeface="微软雅黑" panose="020B0503020204020204" charset="-122"/>
               </a:rPr>
               <a:t>把自己负责的事做到位</a:t>
             </a:r>
+            <a:endParaRPr sz="1400" b="0">
+              <a:solidFill>
+                <a:srgbClr val="4A5B64"/>
+              </a:solidFill>
+              <a:latin typeface="微软雅黑" panose="020B0503020204020204" charset="-122"/>
+            </a:endParaRPr>
           </a:p>
         </p:txBody>
       </p:sp>
@@ -12102,7 +12963,7 @@
           <a:noFill/>
         </p:spPr>
         <p:txBody>
-          <a:bodyPr wrap="square" anchor="t" lIns="0" rIns="0" tIns="0" bIns="0">
+          <a:bodyPr wrap="square" lIns="0" tIns="0" rIns="0" bIns="0" anchor="t">
             <a:spAutoFit/>
           </a:bodyPr>
           <a:lstStyle/>
@@ -12123,10 +12984,16 @@
                 <a:solidFill>
                   <a:srgbClr val="0D6B5C"/>
                 </a:solidFill>
-                <a:latin typeface="Microsoft YaHei"/>
+                <a:latin typeface="微软雅黑" panose="020B0503020204020204" charset="-122"/>
               </a:rPr>
               <a:t>Fast learning</a:t>
             </a:r>
+            <a:endParaRPr sz="1500" b="1">
+              <a:solidFill>
+                <a:srgbClr val="0D6B5C"/>
+              </a:solidFill>
+              <a:latin typeface="微软雅黑" panose="020B0503020204020204" charset="-122"/>
+            </a:endParaRPr>
           </a:p>
         </p:txBody>
       </p:sp>
@@ -12147,7 +13014,7 @@
           <a:noFill/>
         </p:spPr>
         <p:txBody>
-          <a:bodyPr wrap="square" anchor="t" lIns="0" rIns="0" tIns="0" bIns="0">
+          <a:bodyPr wrap="square" lIns="0" tIns="0" rIns="0" bIns="0" anchor="t">
             <a:spAutoFit/>
           </a:bodyPr>
           <a:lstStyle/>
@@ -12168,10 +13035,16 @@
                 <a:solidFill>
                   <a:srgbClr val="4A5B64"/>
                 </a:solidFill>
-                <a:latin typeface="Microsoft YaHei"/>
+                <a:latin typeface="微软雅黑" panose="020B0503020204020204" charset="-122"/>
               </a:rPr>
               <a:t>边做边学，快速迭代</a:t>
             </a:r>
+            <a:endParaRPr sz="1400" b="0">
+              <a:solidFill>
+                <a:srgbClr val="4A5B64"/>
+              </a:solidFill>
+              <a:latin typeface="微软雅黑" panose="020B0503020204020204" charset="-122"/>
+            </a:endParaRPr>
           </a:p>
         </p:txBody>
       </p:sp>
@@ -12238,7 +13111,7 @@
           <a:noFill/>
         </p:spPr>
         <p:txBody>
-          <a:bodyPr wrap="square" anchor="ctr" lIns="0" rIns="0" tIns="0" bIns="0">
+          <a:bodyPr wrap="square" lIns="0" tIns="0" rIns="0" bIns="0" anchor="ctr">
             <a:spAutoFit/>
           </a:bodyPr>
           <a:lstStyle/>
@@ -12259,10 +13132,16 @@
                 <a:solidFill>
                   <a:srgbClr val="0D6B5C"/>
                 </a:solidFill>
-                <a:latin typeface="Microsoft YaHei"/>
+                <a:latin typeface="微软雅黑" panose="020B0503020204020204" charset="-122"/>
               </a:rPr>
               <a:t>年级、经历不重要；重要的是，你想不想一起把这件事做成。</a:t>
             </a:r>
+            <a:endParaRPr sz="1550" b="1">
+              <a:solidFill>
+                <a:srgbClr val="0D6B5C"/>
+              </a:solidFill>
+              <a:latin typeface="微软雅黑" panose="020B0503020204020204" charset="-122"/>
+            </a:endParaRPr>
           </a:p>
         </p:txBody>
       </p:sp>
@@ -12283,7 +13162,7 @@
           <a:noFill/>
         </p:spPr>
         <p:txBody>
-          <a:bodyPr wrap="square" anchor="t" lIns="0" rIns="0" tIns="0" bIns="0">
+          <a:bodyPr wrap="square" lIns="0" tIns="0" rIns="0" bIns="0" anchor="t">
             <a:spAutoFit/>
           </a:bodyPr>
           <a:lstStyle/>
@@ -12304,10 +13183,16 @@
                 <a:solidFill>
                   <a:srgbClr val="8A99A2"/>
                 </a:solidFill>
-                <a:latin typeface="Microsoft YaHei"/>
+                <a:latin typeface="微软雅黑" panose="020B0503020204020204" charset="-122"/>
               </a:rPr>
               <a:t>AI Health Navigator · 团队招募</a:t>
             </a:r>
+            <a:endParaRPr sz="1000" b="0">
+              <a:solidFill>
+                <a:srgbClr val="8A99A2"/>
+              </a:solidFill>
+              <a:latin typeface="微软雅黑" panose="020B0503020204020204" charset="-122"/>
+            </a:endParaRPr>
           </a:p>
         </p:txBody>
       </p:sp>
@@ -12328,7 +13213,7 @@
           <a:noFill/>
         </p:spPr>
         <p:txBody>
-          <a:bodyPr wrap="square" anchor="t" lIns="0" rIns="0" tIns="0" bIns="0">
+          <a:bodyPr wrap="square" lIns="0" tIns="0" rIns="0" bIns="0" anchor="t">
             <a:spAutoFit/>
           </a:bodyPr>
           <a:lstStyle/>
@@ -12349,10 +13234,16 @@
                 <a:solidFill>
                   <a:srgbClr val="4A5B64"/>
                 </a:solidFill>
-                <a:latin typeface="Microsoft YaHei"/>
+                <a:latin typeface="微软雅黑" panose="020B0503020204020204" charset="-122"/>
               </a:rPr>
               <a:t>9</a:t>
             </a:r>
+            <a:endParaRPr sz="1100" b="1">
+              <a:solidFill>
+                <a:srgbClr val="4A5B64"/>
+              </a:solidFill>
+              <a:latin typeface="微软雅黑" panose="020B0503020204020204" charset="-122"/>
+            </a:endParaRPr>
           </a:p>
         </p:txBody>
       </p:sp>
@@ -12680,6 +13571,10 @@
       </a:style>
     </a:lnDef>
   </a:objectDefaults>
-  <a:extraClrSchemeLst/>
+  <a:extLst>
+    <a:ext uri="{05A4C25C-085E-4340-85A3-A5531E510DB2}">
+      <thm15:themeFamily xmlns:thm15="http://schemas.microsoft.com/office/thememl/2012/main" name="Office Theme" id="{62F939B6-93AF-4DB8-9C6B-D6C7DFDC589F}" vid="{4A3C46E8-61CC-4603-A589-7422A47A8E4A}"/>
+    </a:ext>
+  </a:extLst>
 </a:theme>
 </file>